--- a/Unterrichtsmaterial_Oberschule_Sachsen/Klasse_8/03_Robot_Karol/05_Praesentationen/01_02_Robot_Karol_Einstieg.pptx
+++ b/Unterrichtsmaterial_Oberschule_Sachsen/Klasse_8/03_Robot_Karol/05_Praesentationen/01_02_Robot_Karol_Einstieg.pptx
@@ -14,8 +14,6 @@
     <p:sldId id="262" r:id="rId14"/>
     <p:sldId id="263" r:id="rId15"/>
     <p:sldId id="264" r:id="rId16"/>
-    <p:sldId id="265" r:id="rId17"/>
-    <p:sldId id="266" r:id="rId18"/>
   </p:sldIdLst>
   <p:sldSz cx="12191695" cy="6858000" type="screen4x3"/>
   <p:notesSz cx="6858000" cy="9144000"/>
@@ -512,147 +510,7 @@
           <a:lstStyle/>
           <a:p>
             <a:r>
-              <a:t>Robot Karol als didaktisch reduzierte Programmierumgebung. Quellen: https://www.schule.bayern.de/karol · Lehrplan: https://www.schulportal.sachsen.de/lplandb/lehrplan/514</a:t>
-            </a:r>
-          </a:p>
-        </p:txBody>
-      </p:sp>
-      <p:sp>
-        <p:nvSpPr>
-          <p:cNvPr id="4" name="Slide Number Placeholder 3"/>
-          <p:cNvSpPr>
-            <a:spLocks noGrp="1"/>
-          </p:cNvSpPr>
-          <p:nvPr>
-            <p:ph type="sldNum" idx="5" sz="quarter"/>
-          </p:nvPr>
-        </p:nvSpPr>
-        <p:spPr/>
-      </p:sp>
-    </p:spTree>
-  </p:cSld>
-  <p:clrMapOvr>
-    <a:masterClrMapping/>
-  </p:clrMapOvr>
-</p:notes>
-</file>
-
-<file path=ppt/notesSlides/notesSlide10.xml><?xml version="1.0" encoding="utf-8"?>
-<p:notes xmlns:a="http://schemas.openxmlformats.org/drawingml/2006/main" xmlns:p="http://schemas.openxmlformats.org/presentationml/2006/main" xmlns:r="http://schemas.openxmlformats.org/officeDocument/2006/relationships">
-  <p:cSld>
-    <p:spTree>
-      <p:nvGrpSpPr>
-        <p:cNvPr id="1" name=""/>
-        <p:cNvGrpSpPr/>
-        <p:nvPr/>
-      </p:nvGrpSpPr>
-      <p:grpSpPr>
-        <a:xfrm>
-          <a:off x="0" y="0"/>
-          <a:ext cx="0" cy="0"/>
-          <a:chOff x="0" y="0"/>
-          <a:chExt cx="0" cy="0"/>
-        </a:xfrm>
-      </p:grpSpPr>
-      <p:sp>
-        <p:nvSpPr>
-          <p:cNvPr id="2" name="Slide Image Placeholder 1"/>
-          <p:cNvSpPr>
-            <a:spLocks noGrp="1"/>
-          </p:cNvSpPr>
-          <p:nvPr>
-            <p:ph type="sldImg" idx="2"/>
-          </p:nvPr>
-        </p:nvSpPr>
-        <p:spPr/>
-      </p:sp>
-      <p:sp>
-        <p:nvSpPr>
-          <p:cNvPr id="3" name="Notes Placeholder 2"/>
-          <p:cNvSpPr>
-            <a:spLocks noGrp="1"/>
-          </p:cNvSpPr>
-          <p:nvPr>
-            <p:ph type="body" idx="3" sz="quarter"/>
-          </p:nvPr>
-        </p:nvSpPr>
-        <p:spPr/>
-        <p:txBody>
-          <a:bodyPr/>
-          <a:lstStyle/>
-          <a:p>
-            <a:r>
-              <a:t>Ausgangslage und erwartetes Verhalten immer gemeinsam formulieren. Schüler sollen Testfälle nicht nur benennen, sondern begründen.</a:t>
-            </a:r>
-          </a:p>
-        </p:txBody>
-      </p:sp>
-      <p:sp>
-        <p:nvSpPr>
-          <p:cNvPr id="4" name="Slide Number Placeholder 3"/>
-          <p:cNvSpPr>
-            <a:spLocks noGrp="1"/>
-          </p:cNvSpPr>
-          <p:nvPr>
-            <p:ph type="sldNum" idx="5" sz="quarter"/>
-          </p:nvPr>
-        </p:nvSpPr>
-        <p:spPr/>
-      </p:sp>
-    </p:spTree>
-  </p:cSld>
-  <p:clrMapOvr>
-    <a:masterClrMapping/>
-  </p:clrMapOvr>
-</p:notes>
-</file>
-
-<file path=ppt/notesSlides/notesSlide11.xml><?xml version="1.0" encoding="utf-8"?>
-<p:notes xmlns:a="http://schemas.openxmlformats.org/drawingml/2006/main" xmlns:p="http://schemas.openxmlformats.org/presentationml/2006/main" xmlns:r="http://schemas.openxmlformats.org/officeDocument/2006/relationships">
-  <p:cSld>
-    <p:spTree>
-      <p:nvGrpSpPr>
-        <p:cNvPr id="1" name=""/>
-        <p:cNvGrpSpPr/>
-        <p:nvPr/>
-      </p:nvGrpSpPr>
-      <p:grpSpPr>
-        <a:xfrm>
-          <a:off x="0" y="0"/>
-          <a:ext cx="0" cy="0"/>
-          <a:chOff x="0" y="0"/>
-          <a:chExt cx="0" cy="0"/>
-        </a:xfrm>
-      </p:grpSpPr>
-      <p:sp>
-        <p:nvSpPr>
-          <p:cNvPr id="2" name="Slide Image Placeholder 1"/>
-          <p:cNvSpPr>
-            <a:spLocks noGrp="1"/>
-          </p:cNvSpPr>
-          <p:nvPr>
-            <p:ph type="sldImg" idx="2"/>
-          </p:nvPr>
-        </p:nvSpPr>
-        <p:spPr/>
-      </p:sp>
-      <p:sp>
-        <p:nvSpPr>
-          <p:cNvPr id="3" name="Notes Placeholder 2"/>
-          <p:cNvSpPr>
-            <a:spLocks noGrp="1"/>
-          </p:cNvSpPr>
-          <p:nvPr>
-            <p:ph type="body" idx="3" sz="quarter"/>
-          </p:nvPr>
-        </p:nvSpPr>
-        <p:spPr/>
-        <p:txBody>
-          <a:bodyPr/>
-          <a:lstStyle/>
-          <a:p>
-            <a:r>
-              <a:t>Quellenfolie. Keine internen Repository-, Branch- oder Markdown-Verweise in der Schülerpräsentation.</a:t>
+              <a:t>Robot Karol: https://www.schule.bayern.de/karol · Lehrplan: https://www.schulportal.sachsen.de/lplandb/lehrplan/514</a:t>
             </a:r>
           </a:p>
         </p:txBody>
@@ -722,7 +580,7 @@
           <a:lstStyle/>
           <a:p>
             <a:r>
-              <a:t>Leitfragenkasten bleibt frei; Grafik darunter. Algorithmus und Programm unterscheiden.</a:t>
+              <a:t>Karol als didaktisch reduzierte Umgebung einführen.</a:t>
             </a:r>
           </a:p>
         </p:txBody>
@@ -792,7 +650,7 @@
           <a:lstStyle/>
           <a:p>
             <a:r>
-              <a:t>Keine feste Startrichtung behaupten. Optional einen Kompass an der Tafel ergänzen.</a:t>
+              <a:t>Keine feste Himmelsrichtung behaupten.</a:t>
             </a:r>
           </a:p>
         </p:txBody>
@@ -862,7 +720,7 @@
           <a:lstStyle/>
           <a:p>
             <a:r>
-              <a:t>Befehle einzeln demonstrieren. Vor jedem Ausführen Ergebnis vorhersagen lassen.</a:t>
+              <a:t>Vor jedem Ausführen vorhersagen lassen, was passiert.</a:t>
             </a:r>
           </a:p>
         </p:txBody>
@@ -932,7 +790,7 @@
           <a:lstStyle/>
           <a:p>
             <a:r>
-              <a:t>Struktogramm ausführlich erklären. Reihenfolge: Idee/Algorithmus → Struktogramm → Code.</a:t>
+              <a:t>Aus langem Code Wiederholung entwickeln.</a:t>
             </a:r>
           </a:p>
         </p:txBody>
@@ -1002,7 +860,7 @@
           <a:lstStyle/>
           <a:p>
             <a:r>
-              <a:t>Erst Problem zeigen, dann Lösung. Schüler sollen das Muster selbst benennen.</a:t>
+              <a:t>Als Brücke zur Verschachtelung nutzen.</a:t>
             </a:r>
           </a:p>
         </p:txBody>
@@ -1072,7 +930,7 @@
           <a:lstStyle/>
           <a:p>
             <a:r>
-              <a:t>Konkrete Beispiellösung zeigen. Syntax an die verwendete Robot-Karol-Version anpassen, falls diese abweicht.</a:t>
+              <a:t>Debugging als Lifecycle darstellen.</a:t>
             </a:r>
           </a:p>
         </p:txBody>
@@ -1142,7 +1000,7 @@
           <a:lstStyle/>
           <a:p>
             <a:r>
-              <a:t>Code und Struktogramm gemeinsam lesen. Danach Schüler vorhersagen lassen, was bei Seitenlänge 6 geändert wird.</a:t>
+              <a:t>Für jeden Test: Erwartung vor Ausführung notieren.</a:t>
             </a:r>
           </a:p>
         </p:txBody>
@@ -1212,7 +1070,7 @@
           <a:lstStyle/>
           <a:p>
             <a:r>
-              <a:t>Als Lifecycle darstellen. Immer nur eine gezielte Änderung durchführen, danach erneut testen und vergleichen.</a:t>
+              <a:t>Quellenfolie. Quellenangaben sind für Lehrkraft/Weiterverwendung sichtbar.</a:t>
             </a:r>
           </a:p>
         </p:txBody>
@@ -4233,7 +4091,7 @@
             <a:avLst/>
           </a:prstGeom>
           <a:solidFill>
-            <a:srgbClr val="1F374E"/>
+            <a:srgbClr val="202C3C"/>
           </a:solidFill>
           <a:ln>
             <a:noFill/>
@@ -4269,8 +4127,8 @@
         </p:nvSpPr>
         <p:spPr>
           <a:xfrm>
-            <a:off x="731520" y="1417320"/>
-            <a:ext cx="10698480" cy="1188720"/>
+            <a:off x="731520" y="1554480"/>
+            <a:ext cx="10789920" cy="1097280"/>
           </a:xfrm>
           <a:prstGeom prst="rect">
             <a:avLst/>
@@ -4302,8 +4160,8 @@
         </p:nvSpPr>
         <p:spPr>
           <a:xfrm>
-            <a:off x="777240" y="2971800"/>
-            <a:ext cx="10515600" cy="731520"/>
+            <a:off x="777240" y="3017520"/>
+            <a:ext cx="10515600" cy="640080"/>
           </a:xfrm>
           <a:prstGeom prst="rect">
             <a:avLst/>
@@ -4323,1171 +4181,6 @@
                 </a:solidFill>
               </a:rPr>
               <a:t>Klasse 8 · praktische Algorithmik</a:t>
-            </a:r>
-          </a:p>
-        </p:txBody>
-      </p:sp>
-    </p:spTree>
-  </p:cSld>
-  <p:clrMapOvr>
-    <a:masterClrMapping/>
-  </p:clrMapOvr>
-</p:sld>
-</file>
-
-<file path=ppt/slides/slide10.xml><?xml version="1.0" encoding="utf-8"?>
-<p:sld xmlns:a="http://schemas.openxmlformats.org/drawingml/2006/main" xmlns:p="http://schemas.openxmlformats.org/presentationml/2006/main" xmlns:r="http://schemas.openxmlformats.org/officeDocument/2006/relationships">
-  <p:cSld>
-    <p:spTree>
-      <p:nvGrpSpPr>
-        <p:cNvPr id="1" name=""/>
-        <p:cNvGrpSpPr/>
-        <p:nvPr/>
-      </p:nvGrpSpPr>
-      <p:grpSpPr/>
-      <p:sp>
-        <p:nvSpPr>
-          <p:cNvPr id="2" name="Rectangle 1"/>
-          <p:cNvSpPr/>
-          <p:nvPr/>
-        </p:nvSpPr>
-        <p:spPr>
-          <a:xfrm>
-            <a:off x="0" y="0"/>
-            <a:ext cx="12191695" cy="100584"/>
-          </a:xfrm>
-          <a:prstGeom prst="rect">
-            <a:avLst/>
-          </a:prstGeom>
-          <a:solidFill>
-            <a:srgbClr val="4472C4"/>
-          </a:solidFill>
-          <a:ln>
-            <a:noFill/>
-          </a:ln>
-        </p:spPr>
-        <p:style>
-          <a:lnRef idx="1">
-            <a:schemeClr val="accent1"/>
-          </a:lnRef>
-          <a:fillRef idx="3">
-            <a:schemeClr val="accent1"/>
-          </a:fillRef>
-          <a:effectRef idx="2">
-            <a:schemeClr val="accent1"/>
-          </a:effectRef>
-          <a:fontRef idx="minor">
-            <a:schemeClr val="lt1"/>
-          </a:fontRef>
-        </p:style>
-        <p:txBody>
-          <a:bodyPr rtlCol="0" anchor="ctr"/>
-          <a:lstStyle/>
-          <a:p>
-            <a:pPr algn="ctr"/>
-          </a:p>
-        </p:txBody>
-      </p:sp>
-      <p:sp>
-        <p:nvSpPr>
-          <p:cNvPr id="3" name="TextBox 2"/>
-          <p:cNvSpPr txBox="1"/>
-          <p:nvPr/>
-        </p:nvSpPr>
-        <p:spPr>
-          <a:xfrm>
-            <a:off x="594360" y="320040"/>
-            <a:ext cx="10972800" cy="502920"/>
-          </a:xfrm>
-          <a:prstGeom prst="rect">
-            <a:avLst/>
-          </a:prstGeom>
-          <a:noFill/>
-        </p:spPr>
-        <p:txBody>
-          <a:bodyPr wrap="none">
-            <a:spAutoFit/>
-          </a:bodyPr>
-          <a:lstStyle/>
-          <a:p>
-            <a:r>
-              <a:rPr sz="2600" b="1">
-                <a:solidFill>
-                  <a:srgbClr val="1F374E"/>
-                </a:solidFill>
-              </a:rPr>
-              <a:t>Konkrete Testfälle</a:t>
-            </a:r>
-          </a:p>
-        </p:txBody>
-      </p:sp>
-      <p:sp>
-        <p:nvSpPr>
-          <p:cNvPr id="4" name="TextBox 3"/>
-          <p:cNvSpPr txBox="1"/>
-          <p:nvPr/>
-        </p:nvSpPr>
-        <p:spPr>
-          <a:xfrm>
-            <a:off x="685800" y="1234440"/>
-            <a:ext cx="5303520" cy="4937760"/>
-          </a:xfrm>
-          <a:prstGeom prst="rect">
-            <a:avLst/>
-          </a:prstGeom>
-          <a:noFill/>
-        </p:spPr>
-        <p:txBody>
-          <a:bodyPr wrap="square">
-            <a:spAutoFit/>
-          </a:bodyPr>
-          <a:lstStyle/>
-          <a:p>
-            <a:pPr>
-              <a:spcAft>
-                <a:spcPts val="800"/>
-              </a:spcAft>
-              <a:defRPr sz="1900">
-                <a:solidFill>
-                  <a:srgbClr val="232323"/>
-                </a:solidFill>
-              </a:defRPr>
-            </a:pPr>
-            <a:r>
-              <a:t>3 freie Kacheln bis zur Wand: bleibt Karol rechtzeitig stehen?</a:t>
-            </a:r>
-          </a:p>
-          <a:p>
-            <a:pPr>
-              <a:spcAft>
-                <a:spcPts val="800"/>
-              </a:spcAft>
-              <a:defRPr sz="1900">
-                <a:solidFill>
-                  <a:srgbClr val="232323"/>
-                </a:solidFill>
-              </a:defRPr>
-            </a:pPr>
-            <a:r>
-              <a:t>Wand direkt vor Karol: wird kein ungültiger Schritt ausgeführt?</a:t>
-            </a:r>
-          </a:p>
-          <a:p>
-            <a:pPr>
-              <a:spcAft>
-                <a:spcPts val="800"/>
-              </a:spcAft>
-              <a:defRPr sz="1900">
-                <a:solidFill>
-                  <a:srgbClr val="232323"/>
-                </a:solidFill>
-              </a:defRPr>
-            </a:pPr>
-            <a:r>
-              <a:t>6 freie Kacheln: funktioniert derselbe Algorithmus ohne Änderung?</a:t>
-            </a:r>
-          </a:p>
-        </p:txBody>
-      </p:sp>
-      <p:sp>
-        <p:nvSpPr>
-          <p:cNvPr id="5" name="Rectangle 4"/>
-          <p:cNvSpPr/>
-          <p:nvPr/>
-        </p:nvSpPr>
-        <p:spPr>
-          <a:xfrm>
-            <a:off x="6629400" y="1371600"/>
-            <a:ext cx="603504" cy="603504"/>
-          </a:xfrm>
-          <a:prstGeom prst="rect">
-            <a:avLst/>
-          </a:prstGeom>
-          <a:solidFill>
-            <a:srgbClr val="FFFFFF"/>
-          </a:solidFill>
-          <a:ln>
-            <a:solidFill>
-              <a:srgbClr val="646464"/>
-            </a:solidFill>
-          </a:ln>
-        </p:spPr>
-        <p:style>
-          <a:lnRef idx="1">
-            <a:schemeClr val="accent1"/>
-          </a:lnRef>
-          <a:fillRef idx="3">
-            <a:schemeClr val="accent1"/>
-          </a:fillRef>
-          <a:effectRef idx="2">
-            <a:schemeClr val="accent1"/>
-          </a:effectRef>
-          <a:fontRef idx="minor">
-            <a:schemeClr val="lt1"/>
-          </a:fontRef>
-        </p:style>
-        <p:txBody>
-          <a:bodyPr rtlCol="0" anchor="ctr"/>
-          <a:lstStyle/>
-          <a:p>
-            <a:pPr algn="ctr"/>
-          </a:p>
-        </p:txBody>
-      </p:sp>
-      <p:sp>
-        <p:nvSpPr>
-          <p:cNvPr id="6" name="Rectangle 5"/>
-          <p:cNvSpPr/>
-          <p:nvPr/>
-        </p:nvSpPr>
-        <p:spPr>
-          <a:xfrm>
-            <a:off x="7269480" y="1371600"/>
-            <a:ext cx="603504" cy="603504"/>
-          </a:xfrm>
-          <a:prstGeom prst="rect">
-            <a:avLst/>
-          </a:prstGeom>
-          <a:solidFill>
-            <a:srgbClr val="FFFFFF"/>
-          </a:solidFill>
-          <a:ln>
-            <a:solidFill>
-              <a:srgbClr val="646464"/>
-            </a:solidFill>
-          </a:ln>
-        </p:spPr>
-        <p:style>
-          <a:lnRef idx="1">
-            <a:schemeClr val="accent1"/>
-          </a:lnRef>
-          <a:fillRef idx="3">
-            <a:schemeClr val="accent1"/>
-          </a:fillRef>
-          <a:effectRef idx="2">
-            <a:schemeClr val="accent1"/>
-          </a:effectRef>
-          <a:fontRef idx="minor">
-            <a:schemeClr val="lt1"/>
-          </a:fontRef>
-        </p:style>
-        <p:txBody>
-          <a:bodyPr rtlCol="0" anchor="ctr"/>
-          <a:lstStyle/>
-          <a:p>
-            <a:pPr algn="ctr"/>
-          </a:p>
-        </p:txBody>
-      </p:sp>
-      <p:sp>
-        <p:nvSpPr>
-          <p:cNvPr id="7" name="Rectangle 6"/>
-          <p:cNvSpPr/>
-          <p:nvPr/>
-        </p:nvSpPr>
-        <p:spPr>
-          <a:xfrm>
-            <a:off x="7909560" y="1371600"/>
-            <a:ext cx="603504" cy="603504"/>
-          </a:xfrm>
-          <a:prstGeom prst="rect">
-            <a:avLst/>
-          </a:prstGeom>
-          <a:solidFill>
-            <a:srgbClr val="FFFFFF"/>
-          </a:solidFill>
-          <a:ln>
-            <a:solidFill>
-              <a:srgbClr val="646464"/>
-            </a:solidFill>
-          </a:ln>
-        </p:spPr>
-        <p:style>
-          <a:lnRef idx="1">
-            <a:schemeClr val="accent1"/>
-          </a:lnRef>
-          <a:fillRef idx="3">
-            <a:schemeClr val="accent1"/>
-          </a:fillRef>
-          <a:effectRef idx="2">
-            <a:schemeClr val="accent1"/>
-          </a:effectRef>
-          <a:fontRef idx="minor">
-            <a:schemeClr val="lt1"/>
-          </a:fontRef>
-        </p:style>
-        <p:txBody>
-          <a:bodyPr rtlCol="0" anchor="ctr"/>
-          <a:lstStyle/>
-          <a:p>
-            <a:pPr algn="ctr"/>
-          </a:p>
-        </p:txBody>
-      </p:sp>
-      <p:sp>
-        <p:nvSpPr>
-          <p:cNvPr id="8" name="Rectangle 7"/>
-          <p:cNvSpPr/>
-          <p:nvPr/>
-        </p:nvSpPr>
-        <p:spPr>
-          <a:xfrm>
-            <a:off x="8549640" y="1371600"/>
-            <a:ext cx="603504" cy="603504"/>
-          </a:xfrm>
-          <a:prstGeom prst="rect">
-            <a:avLst/>
-          </a:prstGeom>
-          <a:solidFill>
-            <a:srgbClr val="FFFFFF"/>
-          </a:solidFill>
-          <a:ln>
-            <a:solidFill>
-              <a:srgbClr val="646464"/>
-            </a:solidFill>
-          </a:ln>
-        </p:spPr>
-        <p:style>
-          <a:lnRef idx="1">
-            <a:schemeClr val="accent1"/>
-          </a:lnRef>
-          <a:fillRef idx="3">
-            <a:schemeClr val="accent1"/>
-          </a:fillRef>
-          <a:effectRef idx="2">
-            <a:schemeClr val="accent1"/>
-          </a:effectRef>
-          <a:fontRef idx="minor">
-            <a:schemeClr val="lt1"/>
-          </a:fontRef>
-        </p:style>
-        <p:txBody>
-          <a:bodyPr rtlCol="0" anchor="ctr"/>
-          <a:lstStyle/>
-          <a:p>
-            <a:pPr algn="ctr"/>
-          </a:p>
-        </p:txBody>
-      </p:sp>
-      <p:sp>
-        <p:nvSpPr>
-          <p:cNvPr id="9" name="Rectangle 8"/>
-          <p:cNvSpPr/>
-          <p:nvPr/>
-        </p:nvSpPr>
-        <p:spPr>
-          <a:xfrm>
-            <a:off x="6629400" y="2011680"/>
-            <a:ext cx="603504" cy="603504"/>
-          </a:xfrm>
-          <a:prstGeom prst="rect">
-            <a:avLst/>
-          </a:prstGeom>
-          <a:solidFill>
-            <a:srgbClr val="FFFFFF"/>
-          </a:solidFill>
-          <a:ln>
-            <a:solidFill>
-              <a:srgbClr val="646464"/>
-            </a:solidFill>
-          </a:ln>
-        </p:spPr>
-        <p:style>
-          <a:lnRef idx="1">
-            <a:schemeClr val="accent1"/>
-          </a:lnRef>
-          <a:fillRef idx="3">
-            <a:schemeClr val="accent1"/>
-          </a:fillRef>
-          <a:effectRef idx="2">
-            <a:schemeClr val="accent1"/>
-          </a:effectRef>
-          <a:fontRef idx="minor">
-            <a:schemeClr val="lt1"/>
-          </a:fontRef>
-        </p:style>
-        <p:txBody>
-          <a:bodyPr rtlCol="0" anchor="ctr"/>
-          <a:lstStyle/>
-          <a:p>
-            <a:pPr algn="ctr"/>
-          </a:p>
-        </p:txBody>
-      </p:sp>
-      <p:sp>
-        <p:nvSpPr>
-          <p:cNvPr id="10" name="Rectangle 9"/>
-          <p:cNvSpPr/>
-          <p:nvPr/>
-        </p:nvSpPr>
-        <p:spPr>
-          <a:xfrm>
-            <a:off x="7269480" y="2011680"/>
-            <a:ext cx="603504" cy="603504"/>
-          </a:xfrm>
-          <a:prstGeom prst="rect">
-            <a:avLst/>
-          </a:prstGeom>
-          <a:solidFill>
-            <a:srgbClr val="FFFFFF"/>
-          </a:solidFill>
-          <a:ln>
-            <a:solidFill>
-              <a:srgbClr val="646464"/>
-            </a:solidFill>
-          </a:ln>
-        </p:spPr>
-        <p:style>
-          <a:lnRef idx="1">
-            <a:schemeClr val="accent1"/>
-          </a:lnRef>
-          <a:fillRef idx="3">
-            <a:schemeClr val="accent1"/>
-          </a:fillRef>
-          <a:effectRef idx="2">
-            <a:schemeClr val="accent1"/>
-          </a:effectRef>
-          <a:fontRef idx="minor">
-            <a:schemeClr val="lt1"/>
-          </a:fontRef>
-        </p:style>
-        <p:txBody>
-          <a:bodyPr rtlCol="0" anchor="ctr"/>
-          <a:lstStyle/>
-          <a:p>
-            <a:pPr algn="ctr"/>
-          </a:p>
-        </p:txBody>
-      </p:sp>
-      <p:sp>
-        <p:nvSpPr>
-          <p:cNvPr id="11" name="Rectangle 10"/>
-          <p:cNvSpPr/>
-          <p:nvPr/>
-        </p:nvSpPr>
-        <p:spPr>
-          <a:xfrm>
-            <a:off x="7909560" y="2011680"/>
-            <a:ext cx="603504" cy="603504"/>
-          </a:xfrm>
-          <a:prstGeom prst="rect">
-            <a:avLst/>
-          </a:prstGeom>
-          <a:solidFill>
-            <a:srgbClr val="FFFFFF"/>
-          </a:solidFill>
-          <a:ln>
-            <a:solidFill>
-              <a:srgbClr val="646464"/>
-            </a:solidFill>
-          </a:ln>
-        </p:spPr>
-        <p:style>
-          <a:lnRef idx="1">
-            <a:schemeClr val="accent1"/>
-          </a:lnRef>
-          <a:fillRef idx="3">
-            <a:schemeClr val="accent1"/>
-          </a:fillRef>
-          <a:effectRef idx="2">
-            <a:schemeClr val="accent1"/>
-          </a:effectRef>
-          <a:fontRef idx="minor">
-            <a:schemeClr val="lt1"/>
-          </a:fontRef>
-        </p:style>
-        <p:txBody>
-          <a:bodyPr rtlCol="0" anchor="ctr"/>
-          <a:lstStyle/>
-          <a:p>
-            <a:pPr algn="ctr"/>
-          </a:p>
-        </p:txBody>
-      </p:sp>
-      <p:sp>
-        <p:nvSpPr>
-          <p:cNvPr id="12" name="Rectangle 11"/>
-          <p:cNvSpPr/>
-          <p:nvPr/>
-        </p:nvSpPr>
-        <p:spPr>
-          <a:xfrm>
-            <a:off x="8549640" y="2011680"/>
-            <a:ext cx="603504" cy="603504"/>
-          </a:xfrm>
-          <a:prstGeom prst="rect">
-            <a:avLst/>
-          </a:prstGeom>
-          <a:solidFill>
-            <a:srgbClr val="FFFFFF"/>
-          </a:solidFill>
-          <a:ln>
-            <a:solidFill>
-              <a:srgbClr val="646464"/>
-            </a:solidFill>
-          </a:ln>
-        </p:spPr>
-        <p:style>
-          <a:lnRef idx="1">
-            <a:schemeClr val="accent1"/>
-          </a:lnRef>
-          <a:fillRef idx="3">
-            <a:schemeClr val="accent1"/>
-          </a:fillRef>
-          <a:effectRef idx="2">
-            <a:schemeClr val="accent1"/>
-          </a:effectRef>
-          <a:fontRef idx="minor">
-            <a:schemeClr val="lt1"/>
-          </a:fontRef>
-        </p:style>
-        <p:txBody>
-          <a:bodyPr rtlCol="0" anchor="ctr"/>
-          <a:lstStyle/>
-          <a:p>
-            <a:pPr algn="ctr"/>
-          </a:p>
-        </p:txBody>
-      </p:sp>
-      <p:sp>
-        <p:nvSpPr>
-          <p:cNvPr id="13" name="Rectangle 12"/>
-          <p:cNvSpPr/>
-          <p:nvPr/>
-        </p:nvSpPr>
-        <p:spPr>
-          <a:xfrm>
-            <a:off x="6629400" y="2651760"/>
-            <a:ext cx="603504" cy="603504"/>
-          </a:xfrm>
-          <a:prstGeom prst="rect">
-            <a:avLst/>
-          </a:prstGeom>
-          <a:solidFill>
-            <a:srgbClr val="FFFFFF"/>
-          </a:solidFill>
-          <a:ln>
-            <a:solidFill>
-              <a:srgbClr val="646464"/>
-            </a:solidFill>
-          </a:ln>
-        </p:spPr>
-        <p:style>
-          <a:lnRef idx="1">
-            <a:schemeClr val="accent1"/>
-          </a:lnRef>
-          <a:fillRef idx="3">
-            <a:schemeClr val="accent1"/>
-          </a:fillRef>
-          <a:effectRef idx="2">
-            <a:schemeClr val="accent1"/>
-          </a:effectRef>
-          <a:fontRef idx="minor">
-            <a:schemeClr val="lt1"/>
-          </a:fontRef>
-        </p:style>
-        <p:txBody>
-          <a:bodyPr rtlCol="0" anchor="ctr"/>
-          <a:lstStyle/>
-          <a:p>
-            <a:pPr algn="ctr"/>
-          </a:p>
-        </p:txBody>
-      </p:sp>
-      <p:sp>
-        <p:nvSpPr>
-          <p:cNvPr id="14" name="Rectangle 13"/>
-          <p:cNvSpPr/>
-          <p:nvPr/>
-        </p:nvSpPr>
-        <p:spPr>
-          <a:xfrm>
-            <a:off x="7269480" y="2651760"/>
-            <a:ext cx="603504" cy="603504"/>
-          </a:xfrm>
-          <a:prstGeom prst="rect">
-            <a:avLst/>
-          </a:prstGeom>
-          <a:solidFill>
-            <a:srgbClr val="FFFFFF"/>
-          </a:solidFill>
-          <a:ln>
-            <a:solidFill>
-              <a:srgbClr val="646464"/>
-            </a:solidFill>
-          </a:ln>
-        </p:spPr>
-        <p:style>
-          <a:lnRef idx="1">
-            <a:schemeClr val="accent1"/>
-          </a:lnRef>
-          <a:fillRef idx="3">
-            <a:schemeClr val="accent1"/>
-          </a:fillRef>
-          <a:effectRef idx="2">
-            <a:schemeClr val="accent1"/>
-          </a:effectRef>
-          <a:fontRef idx="minor">
-            <a:schemeClr val="lt1"/>
-          </a:fontRef>
-        </p:style>
-        <p:txBody>
-          <a:bodyPr rtlCol="0" anchor="ctr"/>
-          <a:lstStyle/>
-          <a:p>
-            <a:pPr algn="ctr"/>
-          </a:p>
-        </p:txBody>
-      </p:sp>
-      <p:sp>
-        <p:nvSpPr>
-          <p:cNvPr id="15" name="Rectangle 14"/>
-          <p:cNvSpPr/>
-          <p:nvPr/>
-        </p:nvSpPr>
-        <p:spPr>
-          <a:xfrm>
-            <a:off x="7909560" y="2651760"/>
-            <a:ext cx="603504" cy="603504"/>
-          </a:xfrm>
-          <a:prstGeom prst="rect">
-            <a:avLst/>
-          </a:prstGeom>
-          <a:solidFill>
-            <a:srgbClr val="FFFFFF"/>
-          </a:solidFill>
-          <a:ln>
-            <a:solidFill>
-              <a:srgbClr val="646464"/>
-            </a:solidFill>
-          </a:ln>
-        </p:spPr>
-        <p:style>
-          <a:lnRef idx="1">
-            <a:schemeClr val="accent1"/>
-          </a:lnRef>
-          <a:fillRef idx="3">
-            <a:schemeClr val="accent1"/>
-          </a:fillRef>
-          <a:effectRef idx="2">
-            <a:schemeClr val="accent1"/>
-          </a:effectRef>
-          <a:fontRef idx="minor">
-            <a:schemeClr val="lt1"/>
-          </a:fontRef>
-        </p:style>
-        <p:txBody>
-          <a:bodyPr rtlCol="0" anchor="ctr"/>
-          <a:lstStyle/>
-          <a:p>
-            <a:pPr algn="ctr"/>
-          </a:p>
-        </p:txBody>
-      </p:sp>
-      <p:sp>
-        <p:nvSpPr>
-          <p:cNvPr id="16" name="Rectangle 15"/>
-          <p:cNvSpPr/>
-          <p:nvPr/>
-        </p:nvSpPr>
-        <p:spPr>
-          <a:xfrm>
-            <a:off x="8549640" y="2651760"/>
-            <a:ext cx="603504" cy="603504"/>
-          </a:xfrm>
-          <a:prstGeom prst="rect">
-            <a:avLst/>
-          </a:prstGeom>
-          <a:solidFill>
-            <a:srgbClr val="FFFFFF"/>
-          </a:solidFill>
-          <a:ln>
-            <a:solidFill>
-              <a:srgbClr val="646464"/>
-            </a:solidFill>
-          </a:ln>
-        </p:spPr>
-        <p:style>
-          <a:lnRef idx="1">
-            <a:schemeClr val="accent1"/>
-          </a:lnRef>
-          <a:fillRef idx="3">
-            <a:schemeClr val="accent1"/>
-          </a:fillRef>
-          <a:effectRef idx="2">
-            <a:schemeClr val="accent1"/>
-          </a:effectRef>
-          <a:fontRef idx="minor">
-            <a:schemeClr val="lt1"/>
-          </a:fontRef>
-        </p:style>
-        <p:txBody>
-          <a:bodyPr rtlCol="0" anchor="ctr"/>
-          <a:lstStyle/>
-          <a:p>
-            <a:pPr algn="ctr"/>
-          </a:p>
-        </p:txBody>
-      </p:sp>
-      <p:sp>
-        <p:nvSpPr>
-          <p:cNvPr id="17" name="Rectangle 16"/>
-          <p:cNvSpPr/>
-          <p:nvPr/>
-        </p:nvSpPr>
-        <p:spPr>
-          <a:xfrm>
-            <a:off x="6629400" y="3291839"/>
-            <a:ext cx="603504" cy="603504"/>
-          </a:xfrm>
-          <a:prstGeom prst="rect">
-            <a:avLst/>
-          </a:prstGeom>
-          <a:solidFill>
-            <a:srgbClr val="FFFFFF"/>
-          </a:solidFill>
-          <a:ln>
-            <a:solidFill>
-              <a:srgbClr val="646464"/>
-            </a:solidFill>
-          </a:ln>
-        </p:spPr>
-        <p:style>
-          <a:lnRef idx="1">
-            <a:schemeClr val="accent1"/>
-          </a:lnRef>
-          <a:fillRef idx="3">
-            <a:schemeClr val="accent1"/>
-          </a:fillRef>
-          <a:effectRef idx="2">
-            <a:schemeClr val="accent1"/>
-          </a:effectRef>
-          <a:fontRef idx="minor">
-            <a:schemeClr val="lt1"/>
-          </a:fontRef>
-        </p:style>
-        <p:txBody>
-          <a:bodyPr rtlCol="0" anchor="ctr"/>
-          <a:lstStyle/>
-          <a:p>
-            <a:pPr algn="ctr"/>
-          </a:p>
-        </p:txBody>
-      </p:sp>
-      <p:sp>
-        <p:nvSpPr>
-          <p:cNvPr id="18" name="Rectangle 17"/>
-          <p:cNvSpPr/>
-          <p:nvPr/>
-        </p:nvSpPr>
-        <p:spPr>
-          <a:xfrm>
-            <a:off x="7269480" y="3291839"/>
-            <a:ext cx="603504" cy="603504"/>
-          </a:xfrm>
-          <a:prstGeom prst="rect">
-            <a:avLst/>
-          </a:prstGeom>
-          <a:solidFill>
-            <a:srgbClr val="FFFFFF"/>
-          </a:solidFill>
-          <a:ln>
-            <a:solidFill>
-              <a:srgbClr val="646464"/>
-            </a:solidFill>
-          </a:ln>
-        </p:spPr>
-        <p:style>
-          <a:lnRef idx="1">
-            <a:schemeClr val="accent1"/>
-          </a:lnRef>
-          <a:fillRef idx="3">
-            <a:schemeClr val="accent1"/>
-          </a:fillRef>
-          <a:effectRef idx="2">
-            <a:schemeClr val="accent1"/>
-          </a:effectRef>
-          <a:fontRef idx="minor">
-            <a:schemeClr val="lt1"/>
-          </a:fontRef>
-        </p:style>
-        <p:txBody>
-          <a:bodyPr rtlCol="0" anchor="ctr"/>
-          <a:lstStyle/>
-          <a:p>
-            <a:pPr algn="ctr"/>
-          </a:p>
-        </p:txBody>
-      </p:sp>
-      <p:sp>
-        <p:nvSpPr>
-          <p:cNvPr id="19" name="Rectangle 18"/>
-          <p:cNvSpPr/>
-          <p:nvPr/>
-        </p:nvSpPr>
-        <p:spPr>
-          <a:xfrm>
-            <a:off x="7909560" y="3291839"/>
-            <a:ext cx="603504" cy="603504"/>
-          </a:xfrm>
-          <a:prstGeom prst="rect">
-            <a:avLst/>
-          </a:prstGeom>
-          <a:solidFill>
-            <a:srgbClr val="FFFFFF"/>
-          </a:solidFill>
-          <a:ln>
-            <a:solidFill>
-              <a:srgbClr val="646464"/>
-            </a:solidFill>
-          </a:ln>
-        </p:spPr>
-        <p:style>
-          <a:lnRef idx="1">
-            <a:schemeClr val="accent1"/>
-          </a:lnRef>
-          <a:fillRef idx="3">
-            <a:schemeClr val="accent1"/>
-          </a:fillRef>
-          <a:effectRef idx="2">
-            <a:schemeClr val="accent1"/>
-          </a:effectRef>
-          <a:fontRef idx="minor">
-            <a:schemeClr val="lt1"/>
-          </a:fontRef>
-        </p:style>
-        <p:txBody>
-          <a:bodyPr rtlCol="0" anchor="ctr"/>
-          <a:lstStyle/>
-          <a:p>
-            <a:pPr algn="ctr"/>
-          </a:p>
-        </p:txBody>
-      </p:sp>
-      <p:sp>
-        <p:nvSpPr>
-          <p:cNvPr id="20" name="Rectangle 19"/>
-          <p:cNvSpPr/>
-          <p:nvPr/>
-        </p:nvSpPr>
-        <p:spPr>
-          <a:xfrm>
-            <a:off x="8549640" y="3291839"/>
-            <a:ext cx="603504" cy="603504"/>
-          </a:xfrm>
-          <a:prstGeom prst="rect">
-            <a:avLst/>
-          </a:prstGeom>
-          <a:solidFill>
-            <a:srgbClr val="FFFFFF"/>
-          </a:solidFill>
-          <a:ln>
-            <a:solidFill>
-              <a:srgbClr val="646464"/>
-            </a:solidFill>
-          </a:ln>
-        </p:spPr>
-        <p:style>
-          <a:lnRef idx="1">
-            <a:schemeClr val="accent1"/>
-          </a:lnRef>
-          <a:fillRef idx="3">
-            <a:schemeClr val="accent1"/>
-          </a:fillRef>
-          <a:effectRef idx="2">
-            <a:schemeClr val="accent1"/>
-          </a:effectRef>
-          <a:fontRef idx="minor">
-            <a:schemeClr val="lt1"/>
-          </a:fontRef>
-        </p:style>
-        <p:txBody>
-          <a:bodyPr rtlCol="0" anchor="ctr"/>
-          <a:lstStyle/>
-          <a:p>
-            <a:pPr algn="ctr"/>
-          </a:p>
-        </p:txBody>
-      </p:sp>
-      <p:sp>
-        <p:nvSpPr>
-          <p:cNvPr id="21" name="Rounded Rectangle 20"/>
-          <p:cNvSpPr/>
-          <p:nvPr/>
-        </p:nvSpPr>
-        <p:spPr>
-          <a:xfrm>
-            <a:off x="5623560" y="1965960"/>
-            <a:ext cx="731520" cy="731520"/>
-          </a:xfrm>
-          <a:prstGeom prst="roundRect">
-            <a:avLst/>
-          </a:prstGeom>
-          <a:solidFill>
-            <a:srgbClr val="FFE699"/>
-          </a:solidFill>
-          <a:ln>
-            <a:solidFill>
-              <a:srgbClr val="4472C4"/>
-            </a:solidFill>
-          </a:ln>
-        </p:spPr>
-        <p:style>
-          <a:lnRef idx="1">
-            <a:schemeClr val="accent1"/>
-          </a:lnRef>
-          <a:fillRef idx="3">
-            <a:schemeClr val="accent1"/>
-          </a:fillRef>
-          <a:effectRef idx="2">
-            <a:schemeClr val="accent1"/>
-          </a:effectRef>
-          <a:fontRef idx="minor">
-            <a:schemeClr val="lt1"/>
-          </a:fontRef>
-        </p:style>
-        <p:txBody>
-          <a:bodyPr rtlCol="0" anchor="ctr" wrap="square"/>
-          <a:lstStyle/>
-          <a:p>
-            <a:pPr algn="ctr"/>
-            <a:r>
-              <a:rPr sz="1800" b="1">
-                <a:solidFill>
-                  <a:srgbClr val="1F374E"/>
-                </a:solidFill>
-              </a:rPr>
-              <a:t>K</a:t>
-            </a:r>
-          </a:p>
-        </p:txBody>
-      </p:sp>
-      <p:sp>
-        <p:nvSpPr>
-          <p:cNvPr id="22" name="TextBox 21"/>
-          <p:cNvSpPr txBox="1"/>
-          <p:nvPr/>
-        </p:nvSpPr>
-        <p:spPr>
-          <a:xfrm>
-            <a:off x="502920" y="6510528"/>
-            <a:ext cx="11064240" cy="182880"/>
-          </a:xfrm>
-          <a:prstGeom prst="rect">
-            <a:avLst/>
-          </a:prstGeom>
-          <a:noFill/>
-        </p:spPr>
-        <p:txBody>
-          <a:bodyPr wrap="none">
-            <a:spAutoFit/>
-          </a:bodyPr>
-          <a:lstStyle/>
-          <a:p>
-            <a:pPr algn="r"/>
-            <a:r>
-              <a:rPr sz="800">
-                <a:solidFill>
-                  <a:srgbClr val="646464"/>
-                </a:solidFill>
-              </a:rPr>
-              <a:t>Grafik: eigene Darstellung</a:t>
-            </a:r>
-          </a:p>
-        </p:txBody>
-      </p:sp>
-    </p:spTree>
-  </p:cSld>
-  <p:clrMapOvr>
-    <a:masterClrMapping/>
-  </p:clrMapOvr>
-</p:sld>
-</file>
-
-<file path=ppt/slides/slide11.xml><?xml version="1.0" encoding="utf-8"?>
-<p:sld xmlns:a="http://schemas.openxmlformats.org/drawingml/2006/main" xmlns:p="http://schemas.openxmlformats.org/presentationml/2006/main" xmlns:r="http://schemas.openxmlformats.org/officeDocument/2006/relationships">
-  <p:cSld>
-    <p:spTree>
-      <p:nvGrpSpPr>
-        <p:cNvPr id="1" name=""/>
-        <p:cNvGrpSpPr/>
-        <p:nvPr/>
-      </p:nvGrpSpPr>
-      <p:grpSpPr/>
-      <p:sp>
-        <p:nvSpPr>
-          <p:cNvPr id="2" name="Rectangle 1"/>
-          <p:cNvSpPr/>
-          <p:nvPr/>
-        </p:nvSpPr>
-        <p:spPr>
-          <a:xfrm>
-            <a:off x="0" y="0"/>
-            <a:ext cx="12191695" cy="100584"/>
-          </a:xfrm>
-          <a:prstGeom prst="rect">
-            <a:avLst/>
-          </a:prstGeom>
-          <a:solidFill>
-            <a:srgbClr val="4472C4"/>
-          </a:solidFill>
-          <a:ln>
-            <a:noFill/>
-          </a:ln>
-        </p:spPr>
-        <p:style>
-          <a:lnRef idx="1">
-            <a:schemeClr val="accent1"/>
-          </a:lnRef>
-          <a:fillRef idx="3">
-            <a:schemeClr val="accent1"/>
-          </a:fillRef>
-          <a:effectRef idx="2">
-            <a:schemeClr val="accent1"/>
-          </a:effectRef>
-          <a:fontRef idx="minor">
-            <a:schemeClr val="lt1"/>
-          </a:fontRef>
-        </p:style>
-        <p:txBody>
-          <a:bodyPr rtlCol="0" anchor="ctr"/>
-          <a:lstStyle/>
-          <a:p>
-            <a:pPr algn="ctr"/>
-          </a:p>
-        </p:txBody>
-      </p:sp>
-      <p:sp>
-        <p:nvSpPr>
-          <p:cNvPr id="3" name="TextBox 2"/>
-          <p:cNvSpPr txBox="1"/>
-          <p:nvPr/>
-        </p:nvSpPr>
-        <p:spPr>
-          <a:xfrm>
-            <a:off x="594360" y="320040"/>
-            <a:ext cx="10972800" cy="502920"/>
-          </a:xfrm>
-          <a:prstGeom prst="rect">
-            <a:avLst/>
-          </a:prstGeom>
-          <a:noFill/>
-        </p:spPr>
-        <p:txBody>
-          <a:bodyPr wrap="none">
-            <a:spAutoFit/>
-          </a:bodyPr>
-          <a:lstStyle/>
-          <a:p>
-            <a:r>
-              <a:rPr sz="2600" b="1">
-                <a:solidFill>
-                  <a:srgbClr val="1F374E"/>
-                </a:solidFill>
-              </a:rPr>
-              <a:t>Quellen</a:t>
-            </a:r>
-          </a:p>
-        </p:txBody>
-      </p:sp>
-      <p:sp>
-        <p:nvSpPr>
-          <p:cNvPr id="4" name="TextBox 3"/>
-          <p:cNvSpPr txBox="1"/>
-          <p:nvPr/>
-        </p:nvSpPr>
-        <p:spPr>
-          <a:xfrm>
-            <a:off x="731520" y="1234440"/>
-            <a:ext cx="10698480" cy="5029200"/>
-          </a:xfrm>
-          <a:prstGeom prst="rect">
-            <a:avLst/>
-          </a:prstGeom>
-          <a:noFill/>
-        </p:spPr>
-        <p:txBody>
-          <a:bodyPr wrap="square">
-            <a:spAutoFit/>
-          </a:bodyPr>
-          <a:lstStyle/>
-          <a:p>
-            <a:pPr>
-              <a:spcAft>
-                <a:spcPts val="800"/>
-              </a:spcAft>
-              <a:defRPr sz="1500">
-                <a:solidFill>
-                  <a:srgbClr val="232323"/>
-                </a:solidFill>
-              </a:defRPr>
-            </a:pPr>
-            <a:r>
-              <a:t>Robot Karol: https://www.schule.bayern.de/karol</a:t>
-            </a:r>
-          </a:p>
-          <a:p>
-            <a:pPr>
-              <a:spcAft>
-                <a:spcPts val="800"/>
-              </a:spcAft>
-              <a:defRPr sz="1500">
-                <a:solidFill>
-                  <a:srgbClr val="232323"/>
-                </a:solidFill>
-              </a:defRPr>
-            </a:pPr>
-            <a:r>
-              <a:t>Sächsischer Lehrplan Oberschule Informatik, Klassenstufe 8: https://www.schulportal.sachsen.de/lplandb/lehrplan/514</a:t>
-            </a:r>
-          </a:p>
-          <a:p>
-            <a:pPr>
-              <a:spcAft>
-                <a:spcPts val="800"/>
-              </a:spcAft>
-              <a:defRPr sz="1500">
-                <a:solidFill>
-                  <a:srgbClr val="232323"/>
-                </a:solidFill>
-              </a:defRPr>
-            </a:pPr>
-            <a:r>
-              <a:t>Grafiken und Struktogramme: eigene didaktische Darstellung.</a:t>
-            </a:r>
-          </a:p>
-        </p:txBody>
-      </p:sp>
-      <p:sp>
-        <p:nvSpPr>
-          <p:cNvPr id="5" name="TextBox 4"/>
-          <p:cNvSpPr txBox="1"/>
-          <p:nvPr/>
-        </p:nvSpPr>
-        <p:spPr>
-          <a:xfrm>
-            <a:off x="502920" y="6510528"/>
-            <a:ext cx="11064240" cy="182880"/>
-          </a:xfrm>
-          <a:prstGeom prst="rect">
-            <a:avLst/>
-          </a:prstGeom>
-          <a:noFill/>
-        </p:spPr>
-        <p:txBody>
-          <a:bodyPr wrap="none">
-            <a:spAutoFit/>
-          </a:bodyPr>
-          <a:lstStyle/>
-          <a:p>
-            <a:pPr algn="r"/>
-            <a:r>
-              <a:rPr sz="800">
-                <a:solidFill>
-                  <a:srgbClr val="646464"/>
-                </a:solidFill>
-              </a:rPr>
-              <a:t>Quellenangaben · Grafiken: eigene Darstellung</a:t>
             </a:r>
           </a:p>
         </p:txBody>
@@ -5519,13 +4212,13 @@
         <p:spPr>
           <a:xfrm>
             <a:off x="0" y="0"/>
-            <a:ext cx="12191695" cy="100584"/>
-          </a:xfrm>
-          <a:prstGeom prst="rect">
-            <a:avLst/>
-          </a:prstGeom>
-          <a:solidFill>
-            <a:srgbClr val="4472C4"/>
+            <a:ext cx="12191695" cy="109728"/>
+          </a:xfrm>
+          <a:prstGeom prst="rect">
+            <a:avLst/>
+          </a:prstGeom>
+          <a:solidFill>
+            <a:srgbClr val="305396"/>
           </a:solidFill>
           <a:ln>
             <a:noFill/>
@@ -5562,7 +4255,7 @@
         <p:spPr>
           <a:xfrm>
             <a:off x="594360" y="320040"/>
-            <a:ext cx="10972800" cy="502920"/>
+            <a:ext cx="10972800" cy="548640"/>
           </a:xfrm>
           <a:prstGeom prst="rect">
             <a:avLst/>
@@ -5578,7 +4271,7 @@
             <a:r>
               <a:rPr sz="2600" b="1">
                 <a:solidFill>
-                  <a:srgbClr val="1F374E"/>
+                  <a:srgbClr val="202C3C"/>
                 </a:solidFill>
               </a:rPr>
               <a:t>Leitfrage</a:t>
@@ -5594,18 +4287,18 @@
         </p:nvSpPr>
         <p:spPr>
           <a:xfrm>
-            <a:off x="822960" y="1325880"/>
-            <a:ext cx="10515600" cy="1417320"/>
+            <a:off x="777240" y="1234440"/>
+            <a:ext cx="10789920" cy="1234440"/>
           </a:xfrm>
           <a:prstGeom prst="roundRect">
             <a:avLst/>
           </a:prstGeom>
           <a:solidFill>
-            <a:srgbClr val="DCE6F1"/>
+            <a:srgbClr val="E5ECF6"/>
           </a:solidFill>
           <a:ln>
             <a:solidFill>
-              <a:srgbClr val="4472C4"/>
+              <a:srgbClr val="305396"/>
             </a:solidFill>
           </a:ln>
         </p:spPr>
@@ -5629,9 +4322,9 @@
           <a:p>
             <a:pPr algn="ctr"/>
             <a:r>
-              <a:rPr sz="2400" b="1">
+              <a:rPr sz="2200" b="1">
                 <a:solidFill>
-                  <a:srgbClr val="1F374E"/>
+                  <a:srgbClr val="202C3C"/>
                 </a:solidFill>
               </a:rPr>
               <a:t>Wie wird aus einem Algorithmus ein ausführbares Programm?</a:t>
@@ -5647,8 +4340,8 @@
         </p:nvSpPr>
         <p:spPr>
           <a:xfrm>
-            <a:off x="6629400" y="3246120"/>
-            <a:ext cx="603504" cy="603504"/>
+            <a:off x="7040880" y="2743200"/>
+            <a:ext cx="530352" cy="530352"/>
           </a:xfrm>
           <a:prstGeom prst="rect">
             <a:avLst/>
@@ -5658,7 +4351,7 @@
           </a:solidFill>
           <a:ln>
             <a:solidFill>
-              <a:srgbClr val="646464"/>
+              <a:srgbClr val="6E6E6E"/>
             </a:solidFill>
           </a:ln>
         </p:spPr>
@@ -5692,8 +4385,8 @@
         </p:nvSpPr>
         <p:spPr>
           <a:xfrm>
-            <a:off x="7269480" y="3246120"/>
-            <a:ext cx="603504" cy="603504"/>
+            <a:off x="7607808" y="2743200"/>
+            <a:ext cx="530352" cy="530352"/>
           </a:xfrm>
           <a:prstGeom prst="rect">
             <a:avLst/>
@@ -5703,7 +4396,7 @@
           </a:solidFill>
           <a:ln>
             <a:solidFill>
-              <a:srgbClr val="646464"/>
+              <a:srgbClr val="6E6E6E"/>
             </a:solidFill>
           </a:ln>
         </p:spPr>
@@ -5737,8 +4430,8 @@
         </p:nvSpPr>
         <p:spPr>
           <a:xfrm>
-            <a:off x="7909560" y="3246120"/>
-            <a:ext cx="603504" cy="603504"/>
+            <a:off x="8174736" y="2743200"/>
+            <a:ext cx="530352" cy="530352"/>
           </a:xfrm>
           <a:prstGeom prst="rect">
             <a:avLst/>
@@ -5748,7 +4441,7 @@
           </a:solidFill>
           <a:ln>
             <a:solidFill>
-              <a:srgbClr val="646464"/>
+              <a:srgbClr val="6E6E6E"/>
             </a:solidFill>
           </a:ln>
         </p:spPr>
@@ -5782,8 +4475,8 @@
         </p:nvSpPr>
         <p:spPr>
           <a:xfrm>
-            <a:off x="8549640" y="3246120"/>
-            <a:ext cx="603504" cy="603504"/>
+            <a:off x="8741664" y="2743200"/>
+            <a:ext cx="530352" cy="530352"/>
           </a:xfrm>
           <a:prstGeom prst="rect">
             <a:avLst/>
@@ -5793,7 +4486,7 @@
           </a:solidFill>
           <a:ln>
             <a:solidFill>
-              <a:srgbClr val="646464"/>
+              <a:srgbClr val="6E6E6E"/>
             </a:solidFill>
           </a:ln>
         </p:spPr>
@@ -5827,8 +4520,8 @@
         </p:nvSpPr>
         <p:spPr>
           <a:xfrm>
-            <a:off x="6629400" y="3886200"/>
-            <a:ext cx="603504" cy="603504"/>
+            <a:off x="7040880" y="3310128"/>
+            <a:ext cx="530352" cy="530352"/>
           </a:xfrm>
           <a:prstGeom prst="rect">
             <a:avLst/>
@@ -5838,7 +4531,7 @@
           </a:solidFill>
           <a:ln>
             <a:solidFill>
-              <a:srgbClr val="646464"/>
+              <a:srgbClr val="6E6E6E"/>
             </a:solidFill>
           </a:ln>
         </p:spPr>
@@ -5872,8 +4565,8 @@
         </p:nvSpPr>
         <p:spPr>
           <a:xfrm>
-            <a:off x="7269480" y="3886200"/>
-            <a:ext cx="603504" cy="603504"/>
+            <a:off x="7607808" y="3310128"/>
+            <a:ext cx="530352" cy="530352"/>
           </a:xfrm>
           <a:prstGeom prst="rect">
             <a:avLst/>
@@ -5883,7 +4576,7 @@
           </a:solidFill>
           <a:ln>
             <a:solidFill>
-              <a:srgbClr val="646464"/>
+              <a:srgbClr val="6E6E6E"/>
             </a:solidFill>
           </a:ln>
         </p:spPr>
@@ -5917,8 +4610,8 @@
         </p:nvSpPr>
         <p:spPr>
           <a:xfrm>
-            <a:off x="7909560" y="3886200"/>
-            <a:ext cx="603504" cy="603504"/>
+            <a:off x="8174736" y="3310128"/>
+            <a:ext cx="530352" cy="530352"/>
           </a:xfrm>
           <a:prstGeom prst="rect">
             <a:avLst/>
@@ -5928,7 +4621,7 @@
           </a:solidFill>
           <a:ln>
             <a:solidFill>
-              <a:srgbClr val="646464"/>
+              <a:srgbClr val="6E6E6E"/>
             </a:solidFill>
           </a:ln>
         </p:spPr>
@@ -5962,8 +4655,8 @@
         </p:nvSpPr>
         <p:spPr>
           <a:xfrm>
-            <a:off x="8549640" y="3886200"/>
-            <a:ext cx="603504" cy="603504"/>
+            <a:off x="8741664" y="3310128"/>
+            <a:ext cx="530352" cy="530352"/>
           </a:xfrm>
           <a:prstGeom prst="rect">
             <a:avLst/>
@@ -5973,7 +4666,7 @@
           </a:solidFill>
           <a:ln>
             <a:solidFill>
-              <a:srgbClr val="646464"/>
+              <a:srgbClr val="6E6E6E"/>
             </a:solidFill>
           </a:ln>
         </p:spPr>
@@ -6007,8 +4700,8 @@
         </p:nvSpPr>
         <p:spPr>
           <a:xfrm>
-            <a:off x="6629400" y="4526279"/>
-            <a:ext cx="603504" cy="603504"/>
+            <a:off x="7040880" y="3877056"/>
+            <a:ext cx="530352" cy="530352"/>
           </a:xfrm>
           <a:prstGeom prst="rect">
             <a:avLst/>
@@ -6018,7 +4711,7 @@
           </a:solidFill>
           <a:ln>
             <a:solidFill>
-              <a:srgbClr val="646464"/>
+              <a:srgbClr val="6E6E6E"/>
             </a:solidFill>
           </a:ln>
         </p:spPr>
@@ -6052,8 +4745,8 @@
         </p:nvSpPr>
         <p:spPr>
           <a:xfrm>
-            <a:off x="7269480" y="4526279"/>
-            <a:ext cx="603504" cy="603504"/>
+            <a:off x="7607808" y="3877056"/>
+            <a:ext cx="530352" cy="530352"/>
           </a:xfrm>
           <a:prstGeom prst="rect">
             <a:avLst/>
@@ -6063,7 +4756,7 @@
           </a:solidFill>
           <a:ln>
             <a:solidFill>
-              <a:srgbClr val="646464"/>
+              <a:srgbClr val="6E6E6E"/>
             </a:solidFill>
           </a:ln>
         </p:spPr>
@@ -6097,8 +4790,8 @@
         </p:nvSpPr>
         <p:spPr>
           <a:xfrm>
-            <a:off x="7909560" y="4526279"/>
-            <a:ext cx="603504" cy="603504"/>
+            <a:off x="8174736" y="3877056"/>
+            <a:ext cx="530352" cy="530352"/>
           </a:xfrm>
           <a:prstGeom prst="rect">
             <a:avLst/>
@@ -6108,7 +4801,7 @@
           </a:solidFill>
           <a:ln>
             <a:solidFill>
-              <a:srgbClr val="646464"/>
+              <a:srgbClr val="6E6E6E"/>
             </a:solidFill>
           </a:ln>
         </p:spPr>
@@ -6142,8 +4835,8 @@
         </p:nvSpPr>
         <p:spPr>
           <a:xfrm>
-            <a:off x="8549640" y="4526279"/>
-            <a:ext cx="603504" cy="603504"/>
+            <a:off x="8741664" y="3877056"/>
+            <a:ext cx="530352" cy="530352"/>
           </a:xfrm>
           <a:prstGeom prst="rect">
             <a:avLst/>
@@ -6153,7 +4846,7 @@
           </a:solidFill>
           <a:ln>
             <a:solidFill>
-              <a:srgbClr val="646464"/>
+              <a:srgbClr val="6E6E6E"/>
             </a:solidFill>
           </a:ln>
         </p:spPr>
@@ -6187,8 +4880,8 @@
         </p:nvSpPr>
         <p:spPr>
           <a:xfrm>
-            <a:off x="6629400" y="5166359"/>
-            <a:ext cx="603504" cy="603504"/>
+            <a:off x="7040880" y="4443983"/>
+            <a:ext cx="530352" cy="530352"/>
           </a:xfrm>
           <a:prstGeom prst="rect">
             <a:avLst/>
@@ -6198,7 +4891,7 @@
           </a:solidFill>
           <a:ln>
             <a:solidFill>
-              <a:srgbClr val="646464"/>
+              <a:srgbClr val="6E6E6E"/>
             </a:solidFill>
           </a:ln>
         </p:spPr>
@@ -6232,8 +4925,8 @@
         </p:nvSpPr>
         <p:spPr>
           <a:xfrm>
-            <a:off x="7269480" y="5166359"/>
-            <a:ext cx="603504" cy="603504"/>
+            <a:off x="7607808" y="4443983"/>
+            <a:ext cx="530352" cy="530352"/>
           </a:xfrm>
           <a:prstGeom prst="rect">
             <a:avLst/>
@@ -6243,7 +4936,7 @@
           </a:solidFill>
           <a:ln>
             <a:solidFill>
-              <a:srgbClr val="646464"/>
+              <a:srgbClr val="6E6E6E"/>
             </a:solidFill>
           </a:ln>
         </p:spPr>
@@ -6277,8 +4970,8 @@
         </p:nvSpPr>
         <p:spPr>
           <a:xfrm>
-            <a:off x="7909560" y="5166359"/>
-            <a:ext cx="603504" cy="603504"/>
+            <a:off x="8174736" y="4443983"/>
+            <a:ext cx="530352" cy="530352"/>
           </a:xfrm>
           <a:prstGeom prst="rect">
             <a:avLst/>
@@ -6288,7 +4981,7 @@
           </a:solidFill>
           <a:ln>
             <a:solidFill>
-              <a:srgbClr val="646464"/>
+              <a:srgbClr val="6E6E6E"/>
             </a:solidFill>
           </a:ln>
         </p:spPr>
@@ -6322,8 +5015,8 @@
         </p:nvSpPr>
         <p:spPr>
           <a:xfrm>
-            <a:off x="8549640" y="5166359"/>
-            <a:ext cx="603504" cy="603504"/>
+            <a:off x="8741664" y="4443983"/>
+            <a:ext cx="530352" cy="530352"/>
           </a:xfrm>
           <a:prstGeom prst="rect">
             <a:avLst/>
@@ -6333,7 +5026,7 @@
           </a:solidFill>
           <a:ln>
             <a:solidFill>
-              <a:srgbClr val="646464"/>
+              <a:srgbClr val="6E6E6E"/>
             </a:solidFill>
           </a:ln>
         </p:spPr>
@@ -6367,18 +5060,18 @@
         </p:nvSpPr>
         <p:spPr>
           <a:xfrm>
-            <a:off x="5623560" y="3840480"/>
-            <a:ext cx="731520" cy="731520"/>
+            <a:off x="6126480" y="3246120"/>
+            <a:ext cx="658368" cy="658368"/>
           </a:xfrm>
           <a:prstGeom prst="roundRect">
             <a:avLst/>
           </a:prstGeom>
           <a:solidFill>
-            <a:srgbClr val="FFE699"/>
+            <a:srgbClr val="FFE899"/>
           </a:solidFill>
           <a:ln>
             <a:solidFill>
-              <a:srgbClr val="4472C4"/>
+              <a:srgbClr val="305396"/>
             </a:solidFill>
           </a:ln>
         </p:spPr>
@@ -6402,9 +5095,9 @@
           <a:p>
             <a:pPr algn="ctr"/>
             <a:r>
-              <a:rPr sz="1800" b="1">
+              <a:rPr sz="1700" b="1">
                 <a:solidFill>
-                  <a:srgbClr val="1F374E"/>
+                  <a:srgbClr val="202C3C"/>
                 </a:solidFill>
               </a:rPr>
               <a:t>K</a:t>
@@ -6420,8 +5113,8 @@
         </p:nvSpPr>
         <p:spPr>
           <a:xfrm>
-            <a:off x="502920" y="6510528"/>
-            <a:ext cx="11064240" cy="182880"/>
+            <a:off x="365760" y="6510528"/>
+            <a:ext cx="11430000" cy="228600"/>
           </a:xfrm>
           <a:prstGeom prst="rect">
             <a:avLst/>
@@ -6438,7 +5131,7 @@
             <a:r>
               <a:rPr sz="800">
                 <a:solidFill>
-                  <a:srgbClr val="646464"/>
+                  <a:srgbClr val="6E6E6E"/>
                 </a:solidFill>
               </a:rPr>
               <a:t>Grafik: eigene Darstellung</a:t>
@@ -6473,13 +5166,13 @@
         <p:spPr>
           <a:xfrm>
             <a:off x="0" y="0"/>
-            <a:ext cx="12191695" cy="100584"/>
-          </a:xfrm>
-          <a:prstGeom prst="rect">
-            <a:avLst/>
-          </a:prstGeom>
-          <a:solidFill>
-            <a:srgbClr val="4472C4"/>
+            <a:ext cx="12191695" cy="109728"/>
+          </a:xfrm>
+          <a:prstGeom prst="rect">
+            <a:avLst/>
+          </a:prstGeom>
+          <a:solidFill>
+            <a:srgbClr val="305396"/>
           </a:solidFill>
           <a:ln>
             <a:noFill/>
@@ -6516,7 +5209,7 @@
         <p:spPr>
           <a:xfrm>
             <a:off x="594360" y="320040"/>
-            <a:ext cx="10972800" cy="502920"/>
+            <a:ext cx="10972800" cy="548640"/>
           </a:xfrm>
           <a:prstGeom prst="rect">
             <a:avLst/>
@@ -6532,7 +5225,7 @@
             <a:r>
               <a:rPr sz="2600" b="1">
                 <a:solidFill>
-                  <a:srgbClr val="1F374E"/>
+                  <a:srgbClr val="202C3C"/>
                 </a:solidFill>
               </a:rPr>
               <a:t>Die Karol-Welt</a:t>
@@ -6549,7 +5242,7 @@
         <p:spPr>
           <a:xfrm>
             <a:off x="685800" y="1234440"/>
-            <a:ext cx="5303520" cy="4937760"/>
+            <a:ext cx="5394960" cy="5029200"/>
           </a:xfrm>
           <a:prstGeom prst="rect">
             <a:avLst/>
@@ -6564,61 +5257,61 @@
           <a:p>
             <a:pPr>
               <a:spcAft>
-                <a:spcPts val="800"/>
+                <a:spcPts val="700"/>
               </a:spcAft>
               <a:defRPr sz="1900">
                 <a:solidFill>
-                  <a:srgbClr val="232323"/>
+                  <a:srgbClr val="1E1E1E"/>
                 </a:solidFill>
               </a:defRPr>
             </a:pPr>
             <a:r>
-              <a:t>Karol bewegt sich auf Kacheln.</a:t>
+              <a:t>Karol steht auf Kacheln.</a:t>
             </a:r>
           </a:p>
           <a:p>
             <a:pPr>
               <a:spcAft>
-                <a:spcPts val="800"/>
+                <a:spcPts val="700"/>
               </a:spcAft>
               <a:defRPr sz="1900">
                 <a:solidFill>
-                  <a:srgbClr val="232323"/>
+                  <a:srgbClr val="1E1E1E"/>
                 </a:solidFill>
               </a:defRPr>
             </a:pPr>
             <a:r>
-              <a:t>Wände, Ziegel und Marken können Teil der Welt sein.</a:t>
+              <a:t>Welten können Wände, Ziegel und Marken enthalten.</a:t>
             </a:r>
           </a:p>
           <a:p>
             <a:pPr>
               <a:spcAft>
-                <a:spcPts val="800"/>
+                <a:spcPts val="700"/>
               </a:spcAft>
               <a:defRPr sz="1900">
                 <a:solidFill>
-                  <a:srgbClr val="232323"/>
+                  <a:srgbClr val="1E1E1E"/>
                 </a:solidFill>
               </a:defRPr>
             </a:pPr>
             <a:r>
-              <a:t>Karol besitzt eine Position und eine Blickrichtung.</a:t>
+              <a:t>Position und Blickrichtung gehören zum Zustand.</a:t>
             </a:r>
           </a:p>
           <a:p>
             <a:pPr>
               <a:spcAft>
-                <a:spcPts val="800"/>
+                <a:spcPts val="700"/>
               </a:spcAft>
               <a:defRPr sz="1900">
                 <a:solidFill>
-                  <a:srgbClr val="232323"/>
+                  <a:srgbClr val="1E1E1E"/>
                 </a:solidFill>
               </a:defRPr>
             </a:pPr>
             <a:r>
-              <a:t>Die Blickrichtung kann mit Norden, Osten, Süden und Westen beschrieben werden; sie hängt von der Welt ab.</a:t>
+              <a:t>Blickrichtung hängt von der Welt ab.</a:t>
             </a:r>
           </a:p>
         </p:txBody>
@@ -6631,8 +5324,8 @@
         </p:nvSpPr>
         <p:spPr>
           <a:xfrm>
-            <a:off x="6629400" y="1280160"/>
-            <a:ext cx="603504" cy="603504"/>
+            <a:off x="6858000" y="1463040"/>
+            <a:ext cx="530352" cy="530352"/>
           </a:xfrm>
           <a:prstGeom prst="rect">
             <a:avLst/>
@@ -6642,7 +5335,7 @@
           </a:solidFill>
           <a:ln>
             <a:solidFill>
-              <a:srgbClr val="646464"/>
+              <a:srgbClr val="6E6E6E"/>
             </a:solidFill>
           </a:ln>
         </p:spPr>
@@ -6676,8 +5369,8 @@
         </p:nvSpPr>
         <p:spPr>
           <a:xfrm>
-            <a:off x="7269480" y="1280160"/>
-            <a:ext cx="603504" cy="603504"/>
+            <a:off x="7424927" y="1463040"/>
+            <a:ext cx="530352" cy="530352"/>
           </a:xfrm>
           <a:prstGeom prst="rect">
             <a:avLst/>
@@ -6687,7 +5380,7 @@
           </a:solidFill>
           <a:ln>
             <a:solidFill>
-              <a:srgbClr val="646464"/>
+              <a:srgbClr val="6E6E6E"/>
             </a:solidFill>
           </a:ln>
         </p:spPr>
@@ -6721,8 +5414,8 @@
         </p:nvSpPr>
         <p:spPr>
           <a:xfrm>
-            <a:off x="7909560" y="1280160"/>
-            <a:ext cx="603504" cy="603504"/>
+            <a:off x="7991856" y="1463040"/>
+            <a:ext cx="530352" cy="530352"/>
           </a:xfrm>
           <a:prstGeom prst="rect">
             <a:avLst/>
@@ -6732,7 +5425,7 @@
           </a:solidFill>
           <a:ln>
             <a:solidFill>
-              <a:srgbClr val="646464"/>
+              <a:srgbClr val="6E6E6E"/>
             </a:solidFill>
           </a:ln>
         </p:spPr>
@@ -6766,8 +5459,8 @@
         </p:nvSpPr>
         <p:spPr>
           <a:xfrm>
-            <a:off x="8549640" y="1280160"/>
-            <a:ext cx="603504" cy="603504"/>
+            <a:off x="8558784" y="1463040"/>
+            <a:ext cx="530352" cy="530352"/>
           </a:xfrm>
           <a:prstGeom prst="rect">
             <a:avLst/>
@@ -6777,7 +5470,7 @@
           </a:solidFill>
           <a:ln>
             <a:solidFill>
-              <a:srgbClr val="646464"/>
+              <a:srgbClr val="6E6E6E"/>
             </a:solidFill>
           </a:ln>
         </p:spPr>
@@ -6811,8 +5504,8 @@
         </p:nvSpPr>
         <p:spPr>
           <a:xfrm>
-            <a:off x="6629400" y="1920239"/>
-            <a:ext cx="603504" cy="603504"/>
+            <a:off x="6858000" y="2029968"/>
+            <a:ext cx="530352" cy="530352"/>
           </a:xfrm>
           <a:prstGeom prst="rect">
             <a:avLst/>
@@ -6822,7 +5515,7 @@
           </a:solidFill>
           <a:ln>
             <a:solidFill>
-              <a:srgbClr val="646464"/>
+              <a:srgbClr val="6E6E6E"/>
             </a:solidFill>
           </a:ln>
         </p:spPr>
@@ -6856,8 +5549,8 @@
         </p:nvSpPr>
         <p:spPr>
           <a:xfrm>
-            <a:off x="7269480" y="1920239"/>
-            <a:ext cx="603504" cy="603504"/>
+            <a:off x="7424927" y="2029968"/>
+            <a:ext cx="530352" cy="530352"/>
           </a:xfrm>
           <a:prstGeom prst="rect">
             <a:avLst/>
@@ -6867,7 +5560,7 @@
           </a:solidFill>
           <a:ln>
             <a:solidFill>
-              <a:srgbClr val="646464"/>
+              <a:srgbClr val="6E6E6E"/>
             </a:solidFill>
           </a:ln>
         </p:spPr>
@@ -6901,8 +5594,8 @@
         </p:nvSpPr>
         <p:spPr>
           <a:xfrm>
-            <a:off x="7909560" y="1920239"/>
-            <a:ext cx="603504" cy="603504"/>
+            <a:off x="7991856" y="2029968"/>
+            <a:ext cx="530352" cy="530352"/>
           </a:xfrm>
           <a:prstGeom prst="rect">
             <a:avLst/>
@@ -6912,7 +5605,7 @@
           </a:solidFill>
           <a:ln>
             <a:solidFill>
-              <a:srgbClr val="646464"/>
+              <a:srgbClr val="6E6E6E"/>
             </a:solidFill>
           </a:ln>
         </p:spPr>
@@ -6946,8 +5639,8 @@
         </p:nvSpPr>
         <p:spPr>
           <a:xfrm>
-            <a:off x="8549640" y="1920239"/>
-            <a:ext cx="603504" cy="603504"/>
+            <a:off x="8558784" y="2029968"/>
+            <a:ext cx="530352" cy="530352"/>
           </a:xfrm>
           <a:prstGeom prst="rect">
             <a:avLst/>
@@ -6957,7 +5650,7 @@
           </a:solidFill>
           <a:ln>
             <a:solidFill>
-              <a:srgbClr val="646464"/>
+              <a:srgbClr val="6E6E6E"/>
             </a:solidFill>
           </a:ln>
         </p:spPr>
@@ -6991,8 +5684,8 @@
         </p:nvSpPr>
         <p:spPr>
           <a:xfrm>
-            <a:off x="6629400" y="2560320"/>
-            <a:ext cx="603504" cy="603504"/>
+            <a:off x="6858000" y="2596896"/>
+            <a:ext cx="530352" cy="530352"/>
           </a:xfrm>
           <a:prstGeom prst="rect">
             <a:avLst/>
@@ -7002,7 +5695,7 @@
           </a:solidFill>
           <a:ln>
             <a:solidFill>
-              <a:srgbClr val="646464"/>
+              <a:srgbClr val="6E6E6E"/>
             </a:solidFill>
           </a:ln>
         </p:spPr>
@@ -7036,8 +5729,8 @@
         </p:nvSpPr>
         <p:spPr>
           <a:xfrm>
-            <a:off x="7269480" y="2560320"/>
-            <a:ext cx="603504" cy="603504"/>
+            <a:off x="7424927" y="2596896"/>
+            <a:ext cx="530352" cy="530352"/>
           </a:xfrm>
           <a:prstGeom prst="rect">
             <a:avLst/>
@@ -7047,7 +5740,7 @@
           </a:solidFill>
           <a:ln>
             <a:solidFill>
-              <a:srgbClr val="646464"/>
+              <a:srgbClr val="6E6E6E"/>
             </a:solidFill>
           </a:ln>
         </p:spPr>
@@ -7081,8 +5774,8 @@
         </p:nvSpPr>
         <p:spPr>
           <a:xfrm>
-            <a:off x="7909560" y="2560320"/>
-            <a:ext cx="603504" cy="603504"/>
+            <a:off x="7991856" y="2596896"/>
+            <a:ext cx="530352" cy="530352"/>
           </a:xfrm>
           <a:prstGeom prst="rect">
             <a:avLst/>
@@ -7092,7 +5785,7 @@
           </a:solidFill>
           <a:ln>
             <a:solidFill>
-              <a:srgbClr val="646464"/>
+              <a:srgbClr val="6E6E6E"/>
             </a:solidFill>
           </a:ln>
         </p:spPr>
@@ -7126,8 +5819,8 @@
         </p:nvSpPr>
         <p:spPr>
           <a:xfrm>
-            <a:off x="8549640" y="2560320"/>
-            <a:ext cx="603504" cy="603504"/>
+            <a:off x="8558784" y="2596896"/>
+            <a:ext cx="530352" cy="530352"/>
           </a:xfrm>
           <a:prstGeom prst="rect">
             <a:avLst/>
@@ -7137,7 +5830,7 @@
           </a:solidFill>
           <a:ln>
             <a:solidFill>
-              <a:srgbClr val="646464"/>
+              <a:srgbClr val="6E6E6E"/>
             </a:solidFill>
           </a:ln>
         </p:spPr>
@@ -7171,8 +5864,8 @@
         </p:nvSpPr>
         <p:spPr>
           <a:xfrm>
-            <a:off x="6629400" y="3200399"/>
-            <a:ext cx="603504" cy="603504"/>
+            <a:off x="6858000" y="3163824"/>
+            <a:ext cx="530352" cy="530352"/>
           </a:xfrm>
           <a:prstGeom prst="rect">
             <a:avLst/>
@@ -7182,7 +5875,7 @@
           </a:solidFill>
           <a:ln>
             <a:solidFill>
-              <a:srgbClr val="646464"/>
+              <a:srgbClr val="6E6E6E"/>
             </a:solidFill>
           </a:ln>
         </p:spPr>
@@ -7216,8 +5909,8 @@
         </p:nvSpPr>
         <p:spPr>
           <a:xfrm>
-            <a:off x="7269480" y="3200399"/>
-            <a:ext cx="603504" cy="603504"/>
+            <a:off x="7424927" y="3163824"/>
+            <a:ext cx="530352" cy="530352"/>
           </a:xfrm>
           <a:prstGeom prst="rect">
             <a:avLst/>
@@ -7227,7 +5920,7 @@
           </a:solidFill>
           <a:ln>
             <a:solidFill>
-              <a:srgbClr val="646464"/>
+              <a:srgbClr val="6E6E6E"/>
             </a:solidFill>
           </a:ln>
         </p:spPr>
@@ -7261,8 +5954,8 @@
         </p:nvSpPr>
         <p:spPr>
           <a:xfrm>
-            <a:off x="7909560" y="3200399"/>
-            <a:ext cx="603504" cy="603504"/>
+            <a:off x="7991856" y="3163824"/>
+            <a:ext cx="530352" cy="530352"/>
           </a:xfrm>
           <a:prstGeom prst="rect">
             <a:avLst/>
@@ -7272,7 +5965,7 @@
           </a:solidFill>
           <a:ln>
             <a:solidFill>
-              <a:srgbClr val="646464"/>
+              <a:srgbClr val="6E6E6E"/>
             </a:solidFill>
           </a:ln>
         </p:spPr>
@@ -7306,8 +5999,8 @@
         </p:nvSpPr>
         <p:spPr>
           <a:xfrm>
-            <a:off x="8549640" y="3200399"/>
-            <a:ext cx="603504" cy="603504"/>
+            <a:off x="8558784" y="3163824"/>
+            <a:ext cx="530352" cy="530352"/>
           </a:xfrm>
           <a:prstGeom prst="rect">
             <a:avLst/>
@@ -7317,7 +6010,7 @@
           </a:solidFill>
           <a:ln>
             <a:solidFill>
-              <a:srgbClr val="646464"/>
+              <a:srgbClr val="6E6E6E"/>
             </a:solidFill>
           </a:ln>
         </p:spPr>
@@ -7351,18 +6044,18 @@
         </p:nvSpPr>
         <p:spPr>
           <a:xfrm>
-            <a:off x="5623560" y="1874519"/>
-            <a:ext cx="731520" cy="731520"/>
+            <a:off x="5943600" y="1965960"/>
+            <a:ext cx="658368" cy="658368"/>
           </a:xfrm>
           <a:prstGeom prst="roundRect">
             <a:avLst/>
           </a:prstGeom>
           <a:solidFill>
-            <a:srgbClr val="FFE699"/>
+            <a:srgbClr val="FFE899"/>
           </a:solidFill>
           <a:ln>
             <a:solidFill>
-              <a:srgbClr val="4472C4"/>
+              <a:srgbClr val="305396"/>
             </a:solidFill>
           </a:ln>
         </p:spPr>
@@ -7386,9 +6079,9 @@
           <a:p>
             <a:pPr algn="ctr"/>
             <a:r>
-              <a:rPr sz="1800" b="1">
+              <a:rPr sz="1700" b="1">
                 <a:solidFill>
-                  <a:srgbClr val="1F374E"/>
+                  <a:srgbClr val="202C3C"/>
                 </a:solidFill>
               </a:rPr>
               <a:t>K</a:t>
@@ -7404,8 +6097,8 @@
         </p:nvSpPr>
         <p:spPr>
           <a:xfrm>
-            <a:off x="502920" y="6510528"/>
-            <a:ext cx="11064240" cy="182880"/>
+            <a:off x="365760" y="6510528"/>
+            <a:ext cx="11430000" cy="228600"/>
           </a:xfrm>
           <a:prstGeom prst="rect">
             <a:avLst/>
@@ -7422,7 +6115,7 @@
             <a:r>
               <a:rPr sz="800">
                 <a:solidFill>
-                  <a:srgbClr val="646464"/>
+                  <a:srgbClr val="6E6E6E"/>
                 </a:solidFill>
               </a:rPr>
               <a:t>Grafik: eigene Darstellung</a:t>
@@ -7457,13 +6150,13 @@
         <p:spPr>
           <a:xfrm>
             <a:off x="0" y="0"/>
-            <a:ext cx="12191695" cy="100584"/>
-          </a:xfrm>
-          <a:prstGeom prst="rect">
-            <a:avLst/>
-          </a:prstGeom>
-          <a:solidFill>
-            <a:srgbClr val="4472C4"/>
+            <a:ext cx="12191695" cy="109728"/>
+          </a:xfrm>
+          <a:prstGeom prst="rect">
+            <a:avLst/>
+          </a:prstGeom>
+          <a:solidFill>
+            <a:srgbClr val="305396"/>
           </a:solidFill>
           <a:ln>
             <a:noFill/>
@@ -7500,7 +6193,7 @@
         <p:spPr>
           <a:xfrm>
             <a:off x="594360" y="320040"/>
-            <a:ext cx="10972800" cy="502920"/>
+            <a:ext cx="10972800" cy="548640"/>
           </a:xfrm>
           <a:prstGeom prst="rect">
             <a:avLst/>
@@ -7516,7 +6209,7 @@
             <a:r>
               <a:rPr sz="2600" b="1">
                 <a:solidFill>
-                  <a:srgbClr val="1F374E"/>
+                  <a:srgbClr val="202C3C"/>
                 </a:solidFill>
               </a:rPr>
               <a:t>Grundbefehle</a:t>
@@ -7533,7 +6226,7 @@
         <p:spPr>
           <a:xfrm>
             <a:off x="685800" y="1234440"/>
-            <a:ext cx="5303520" cy="4937760"/>
+            <a:ext cx="5394960" cy="5029200"/>
           </a:xfrm>
           <a:prstGeom prst="rect">
             <a:avLst/>
@@ -7548,11 +6241,11 @@
           <a:p>
             <a:pPr>
               <a:spcAft>
-                <a:spcPts val="800"/>
+                <a:spcPts val="700"/>
               </a:spcAft>
               <a:defRPr sz="1900">
                 <a:solidFill>
-                  <a:srgbClr val="232323"/>
+                  <a:srgbClr val="1E1E1E"/>
                 </a:solidFill>
               </a:defRPr>
             </a:pPr>
@@ -7563,11 +6256,11 @@
           <a:p>
             <a:pPr>
               <a:spcAft>
-                <a:spcPts val="800"/>
+                <a:spcPts val="700"/>
               </a:spcAft>
               <a:defRPr sz="1900">
                 <a:solidFill>
-                  <a:srgbClr val="232323"/>
+                  <a:srgbClr val="1E1E1E"/>
                 </a:solidFill>
               </a:defRPr>
             </a:pPr>
@@ -7578,11 +6271,11 @@
           <a:p>
             <a:pPr>
               <a:spcAft>
-                <a:spcPts val="800"/>
+                <a:spcPts val="700"/>
               </a:spcAft>
               <a:defRPr sz="1900">
                 <a:solidFill>
-                  <a:srgbClr val="232323"/>
+                  <a:srgbClr val="1E1E1E"/>
                 </a:solidFill>
               </a:defRPr>
             </a:pPr>
@@ -7593,11 +6286,11 @@
           <a:p>
             <a:pPr>
               <a:spcAft>
-                <a:spcPts val="800"/>
+                <a:spcPts val="700"/>
               </a:spcAft>
               <a:defRPr sz="1900">
                 <a:solidFill>
-                  <a:srgbClr val="232323"/>
+                  <a:srgbClr val="1E1E1E"/>
                 </a:solidFill>
               </a:defRPr>
             </a:pPr>
@@ -7608,11 +6301,11 @@
           <a:p>
             <a:pPr>
               <a:spcAft>
-                <a:spcPts val="800"/>
+                <a:spcPts val="700"/>
               </a:spcAft>
               <a:defRPr sz="1900">
                 <a:solidFill>
-                  <a:srgbClr val="232323"/>
+                  <a:srgbClr val="1E1E1E"/>
                 </a:solidFill>
               </a:defRPr>
             </a:pPr>
@@ -7630,18 +6323,18 @@
         </p:nvSpPr>
         <p:spPr>
           <a:xfrm>
-            <a:off x="6583680" y="1325880"/>
-            <a:ext cx="4389120" cy="3383280"/>
-          </a:xfrm>
-          <a:prstGeom prst="rect">
-            <a:avLst/>
-          </a:prstGeom>
-          <a:solidFill>
-            <a:srgbClr val="FAFAFA"/>
+            <a:off x="6858000" y="1554480"/>
+            <a:ext cx="3931920" cy="2926080"/>
+          </a:xfrm>
+          <a:prstGeom prst="rect">
+            <a:avLst/>
+          </a:prstGeom>
+          <a:solidFill>
+            <a:srgbClr val="FCFCFC"/>
           </a:solidFill>
           <a:ln>
             <a:solidFill>
-              <a:srgbClr val="646464"/>
+              <a:srgbClr val="6E6E6E"/>
             </a:solidFill>
           </a:ln>
         </p:spPr>
@@ -7665,9 +6358,9 @@
           <a:p>
             <a:pPr algn="ctr"/>
             <a:r>
-              <a:rPr sz="1700">
+              <a:rPr sz="1800">
                 <a:solidFill>
-                  <a:srgbClr val="232323"/>
+                  <a:srgbClr val="1E1E1E"/>
                 </a:solidFill>
                 <a:latin typeface="Consolas"/>
               </a:rPr>
@@ -7688,8 +6381,8 @@
         </p:nvSpPr>
         <p:spPr>
           <a:xfrm>
-            <a:off x="502920" y="6510528"/>
-            <a:ext cx="11064240" cy="182880"/>
+            <a:off x="365760" y="6510528"/>
+            <a:ext cx="11430000" cy="228600"/>
           </a:xfrm>
           <a:prstGeom prst="rect">
             <a:avLst/>
@@ -7706,7 +6399,7 @@
             <a:r>
               <a:rPr sz="800">
                 <a:solidFill>
-                  <a:srgbClr val="646464"/>
+                  <a:srgbClr val="6E6E6E"/>
                 </a:solidFill>
               </a:rPr>
               <a:t>Grafik: eigene Darstellung</a:t>
@@ -7741,13 +6434,13 @@
         <p:spPr>
           <a:xfrm>
             <a:off x="0" y="0"/>
-            <a:ext cx="12191695" cy="100584"/>
-          </a:xfrm>
-          <a:prstGeom prst="rect">
-            <a:avLst/>
-          </a:prstGeom>
-          <a:solidFill>
-            <a:srgbClr val="4472C4"/>
+            <a:ext cx="12191695" cy="109728"/>
+          </a:xfrm>
+          <a:prstGeom prst="rect">
+            <a:avLst/>
+          </a:prstGeom>
+          <a:solidFill>
+            <a:srgbClr val="305396"/>
           </a:solidFill>
           <a:ln>
             <a:noFill/>
@@ -7784,7 +6477,7 @@
         <p:spPr>
           <a:xfrm>
             <a:off x="594360" y="320040"/>
-            <a:ext cx="10972800" cy="502920"/>
+            <a:ext cx="10972800" cy="548640"/>
           </a:xfrm>
           <a:prstGeom prst="rect">
             <a:avLst/>
@@ -7800,10 +6493,10 @@
             <a:r>
               <a:rPr sz="2600" b="1">
                 <a:solidFill>
-                  <a:srgbClr val="1F374E"/>
+                  <a:srgbClr val="202C3C"/>
                 </a:solidFill>
               </a:rPr>
-              <a:t>Vom Algorithmus zum Struktogramm</a:t>
+              <a:t>Wiederholung statt Kopieren</a:t>
             </a:r>
           </a:p>
         </p:txBody>
@@ -7817,7 +6510,7 @@
         <p:spPr>
           <a:xfrm>
             <a:off x="685800" y="1234440"/>
-            <a:ext cx="5303520" cy="4937760"/>
+            <a:ext cx="5394960" cy="5029200"/>
           </a:xfrm>
           <a:prstGeom prst="rect">
             <a:avLst/>
@@ -7832,70 +6525,85 @@
           <a:p>
             <a:pPr>
               <a:spcAft>
-                <a:spcPts val="800"/>
+                <a:spcPts val="700"/>
               </a:spcAft>
               <a:defRPr sz="1900">
                 <a:solidFill>
-                  <a:srgbClr val="232323"/>
+                  <a:srgbClr val="1E1E1E"/>
                 </a:solidFill>
               </a:defRPr>
             </a:pPr>
             <a:r>
-              <a:t>Struktogramm = grafische Darstellung eines Algorithmus.</a:t>
+              <a:t>gleiche Schritte erkennen</a:t>
             </a:r>
           </a:p>
           <a:p>
             <a:pPr>
               <a:spcAft>
-                <a:spcPts val="800"/>
+                <a:spcPts val="700"/>
               </a:spcAft>
               <a:defRPr sz="1900">
                 <a:solidFill>
-                  <a:srgbClr val="232323"/>
+                  <a:srgbClr val="1E1E1E"/>
                 </a:solidFill>
               </a:defRPr>
             </a:pPr>
             <a:r>
-              <a:t>Blöcke zeigen Sequenz, Wiederholung und später Bedingungen.</a:t>
+              <a:t>feste Anzahl verwenden</a:t>
             </a:r>
           </a:p>
           <a:p>
             <a:pPr>
               <a:spcAft>
-                <a:spcPts val="800"/>
+                <a:spcPts val="700"/>
               </a:spcAft>
               <a:defRPr sz="1900">
                 <a:solidFill>
-                  <a:srgbClr val="232323"/>
+                  <a:srgbClr val="1E1E1E"/>
                 </a:solidFill>
               </a:defRPr>
             </a:pPr>
             <a:r>
-              <a:t>Danach wird der Ablauf in Karol-Code übertragen.</a:t>
-            </a:r>
-          </a:p>
-        </p:txBody>
-      </p:sp>
-      <p:sp>
-        <p:nvSpPr>
-          <p:cNvPr id="5" name="Rounded Rectangle 4"/>
+              <a:t>Code wird kürzer</a:t>
+            </a:r>
+          </a:p>
+          <a:p>
+            <a:pPr>
+              <a:spcAft>
+                <a:spcPts val="700"/>
+              </a:spcAft>
+              <a:defRPr sz="1900">
+                <a:solidFill>
+                  <a:srgbClr val="1E1E1E"/>
+                </a:solidFill>
+              </a:defRPr>
+            </a:pPr>
+            <a:r>
+              <a:t>Änderungen sind einfacher</a:t>
+            </a:r>
+          </a:p>
+        </p:txBody>
+      </p:sp>
+      <p:sp>
+        <p:nvSpPr>
+          <p:cNvPr id="5" name="Rectangle 4"/>
           <p:cNvSpPr/>
           <p:nvPr/>
         </p:nvSpPr>
         <p:spPr>
           <a:xfrm>
-            <a:off x="6217920" y="1188720"/>
-            <a:ext cx="5029200" cy="566928"/>
-          </a:xfrm>
-          <a:prstGeom prst="roundRect">
-            <a:avLst/>
-          </a:prstGeom>
-          <a:solidFill>
-            <a:srgbClr val="DCE6F1"/>
+            <a:off x="6400800" y="1554480"/>
+            <a:ext cx="4572000" cy="2103120"/>
+          </a:xfrm>
+          <a:prstGeom prst="rect">
+            <a:avLst/>
+          </a:prstGeom>
+          <a:solidFill>
+            <a:srgbClr val="FCFCFC"/>
           </a:solidFill>
           <a:ln>
             <a:solidFill>
-              <a:srgbClr val="4472C4"/>
+              <a:srgbClr val="6E6E6E"/>
             </a:solidFill>
           </a:ln>
         </p:spPr>
@@ -7914,137 +6622,34 @@
           </a:fontRef>
         </p:style>
         <p:txBody>
-          <a:bodyPr rtlCol="0" anchor="ctr" wrap="square"/>
+          <a:bodyPr rtlCol="0" anchor="ctr" wrap="none"/>
           <a:lstStyle/>
           <a:p>
             <a:pPr algn="ctr"/>
             <a:r>
-              <a:rPr sz="1300" b="1">
+              <a:rPr sz="1800">
                 <a:solidFill>
-                  <a:srgbClr val="1F374E"/>
+                  <a:srgbClr val="1E1E1E"/>
                 </a:solidFill>
+                <a:latin typeface="Consolas"/>
               </a:rPr>
-              <a:t>3-mal wiederholen</a:t>
-            </a:r>
-          </a:p>
-        </p:txBody>
-      </p:sp>
-      <p:sp>
-        <p:nvSpPr>
-          <p:cNvPr id="6" name="Rounded Rectangle 5"/>
-          <p:cNvSpPr/>
-          <p:nvPr/>
-        </p:nvSpPr>
-        <p:spPr>
-          <a:xfrm>
-            <a:off x="6537959" y="1828800"/>
-            <a:ext cx="4389120" cy="566928"/>
-          </a:xfrm>
-          <a:prstGeom prst="roundRect">
-            <a:avLst/>
-          </a:prstGeom>
-          <a:solidFill>
-            <a:srgbClr val="F2F6FA"/>
-          </a:solidFill>
-          <a:ln>
-            <a:solidFill>
-              <a:srgbClr val="4472C4"/>
-            </a:solidFill>
-          </a:ln>
-        </p:spPr>
-        <p:style>
-          <a:lnRef idx="1">
-            <a:schemeClr val="accent1"/>
-          </a:lnRef>
-          <a:fillRef idx="3">
-            <a:schemeClr val="accent1"/>
-          </a:fillRef>
-          <a:effectRef idx="2">
-            <a:schemeClr val="accent1"/>
-          </a:effectRef>
-          <a:fontRef idx="minor">
-            <a:schemeClr val="lt1"/>
-          </a:fontRef>
-        </p:style>
-        <p:txBody>
-          <a:bodyPr rtlCol="0" anchor="ctr" wrap="square"/>
-          <a:lstStyle/>
-          <a:p>
-            <a:pPr algn="ctr"/>
-            <a:r>
-              <a:rPr sz="1300" b="1">
-                <a:solidFill>
-                  <a:srgbClr val="1F374E"/>
-                </a:solidFill>
-              </a:rPr>
-              <a:t>Schritt</a:t>
-            </a:r>
-          </a:p>
-        </p:txBody>
-      </p:sp>
-      <p:sp>
-        <p:nvSpPr>
-          <p:cNvPr id="7" name="Rounded Rectangle 6"/>
-          <p:cNvSpPr/>
-          <p:nvPr/>
-        </p:nvSpPr>
-        <p:spPr>
-          <a:xfrm>
-            <a:off x="6217920" y="2468880"/>
-            <a:ext cx="5029200" cy="566928"/>
-          </a:xfrm>
-          <a:prstGeom prst="roundRect">
-            <a:avLst/>
-          </a:prstGeom>
-          <a:solidFill>
-            <a:srgbClr val="DCE6F1"/>
-          </a:solidFill>
-          <a:ln>
-            <a:solidFill>
-              <a:srgbClr val="4472C4"/>
-            </a:solidFill>
-          </a:ln>
-        </p:spPr>
-        <p:style>
-          <a:lnRef idx="1">
-            <a:schemeClr val="accent1"/>
-          </a:lnRef>
-          <a:fillRef idx="3">
-            <a:schemeClr val="accent1"/>
-          </a:fillRef>
-          <a:effectRef idx="2">
-            <a:schemeClr val="accent1"/>
-          </a:effectRef>
-          <a:fontRef idx="minor">
-            <a:schemeClr val="lt1"/>
-          </a:fontRef>
-        </p:style>
-        <p:txBody>
-          <a:bodyPr rtlCol="0" anchor="ctr" wrap="square"/>
-          <a:lstStyle/>
-          <a:p>
-            <a:pPr algn="ctr"/>
-            <a:r>
-              <a:rPr sz="1300" b="1">
-                <a:solidFill>
-                  <a:srgbClr val="1F374E"/>
-                </a:solidFill>
-              </a:rPr>
-              <a:t>LinksDrehen</a:t>
-            </a:r>
-          </a:p>
-        </p:txBody>
-      </p:sp>
-      <p:sp>
-        <p:nvSpPr>
-          <p:cNvPr id="8" name="TextBox 7"/>
+              <a:t>wiederhole 10 mal
+    Schritt
+*wiederhole</a:t>
+            </a:r>
+          </a:p>
+        </p:txBody>
+      </p:sp>
+      <p:sp>
+        <p:nvSpPr>
+          <p:cNvPr id="6" name="TextBox 5"/>
           <p:cNvSpPr txBox="1"/>
           <p:nvPr/>
         </p:nvSpPr>
         <p:spPr>
           <a:xfrm>
-            <a:off x="502920" y="6510528"/>
-            <a:ext cx="11064240" cy="182880"/>
+            <a:off x="365760" y="6510528"/>
+            <a:ext cx="11430000" cy="228600"/>
           </a:xfrm>
           <a:prstGeom prst="rect">
             <a:avLst/>
@@ -8061,7 +6666,7 @@
             <a:r>
               <a:rPr sz="800">
                 <a:solidFill>
-                  <a:srgbClr val="646464"/>
+                  <a:srgbClr val="6E6E6E"/>
                 </a:solidFill>
               </a:rPr>
               <a:t>Grafik: eigene Darstellung</a:t>
@@ -8096,13 +6701,13 @@
         <p:spPr>
           <a:xfrm>
             <a:off x="0" y="0"/>
-            <a:ext cx="12191695" cy="100584"/>
-          </a:xfrm>
-          <a:prstGeom prst="rect">
-            <a:avLst/>
-          </a:prstGeom>
-          <a:solidFill>
-            <a:srgbClr val="4472C4"/>
+            <a:ext cx="12191695" cy="109728"/>
+          </a:xfrm>
+          <a:prstGeom prst="rect">
+            <a:avLst/>
+          </a:prstGeom>
+          <a:solidFill>
+            <a:srgbClr val="305396"/>
           </a:solidFill>
           <a:ln>
             <a:noFill/>
@@ -8139,7 +6744,7 @@
         <p:spPr>
           <a:xfrm>
             <a:off x="594360" y="320040"/>
-            <a:ext cx="10972800" cy="502920"/>
+            <a:ext cx="10972800" cy="548640"/>
           </a:xfrm>
           <a:prstGeom prst="rect">
             <a:avLst/>
@@ -8155,10 +6760,10 @@
             <a:r>
               <a:rPr sz="2600" b="1">
                 <a:solidFill>
-                  <a:srgbClr val="1F374E"/>
+                  <a:srgbClr val="202C3C"/>
                 </a:solidFill>
               </a:rPr>
-              <a:t>Problem: zehn gleiche Schritte</a:t>
+              <a:t>Quadrat mit Wiederholung</a:t>
             </a:r>
           </a:p>
         </p:txBody>
@@ -8172,7 +6777,7 @@
         <p:spPr>
           <a:xfrm>
             <a:off x="685800" y="1234440"/>
-            <a:ext cx="5303520" cy="4937760"/>
+            <a:ext cx="5394960" cy="5029200"/>
           </a:xfrm>
           <a:prstGeom prst="rect">
             <a:avLst/>
@@ -8187,46 +6792,61 @@
           <a:p>
             <a:pPr>
               <a:spcAft>
-                <a:spcPts val="800"/>
+                <a:spcPts val="700"/>
               </a:spcAft>
               <a:defRPr sz="1900">
                 <a:solidFill>
-                  <a:srgbClr val="232323"/>
+                  <a:srgbClr val="1E1E1E"/>
                 </a:solidFill>
               </a:defRPr>
             </a:pPr>
             <a:r>
-              <a:t>Zehnmal „Schritt“ zu schreiben ist lang und fehleranfällig.</a:t>
+              <a:t>Quadrat: vier Seiten</a:t>
             </a:r>
           </a:p>
           <a:p>
             <a:pPr>
               <a:spcAft>
-                <a:spcPts val="800"/>
+                <a:spcPts val="700"/>
               </a:spcAft>
               <a:defRPr sz="1900">
                 <a:solidFill>
-                  <a:srgbClr val="232323"/>
+                  <a:srgbClr val="1E1E1E"/>
                 </a:solidFill>
               </a:defRPr>
             </a:pPr>
             <a:r>
-              <a:t>Wir erkennen ein wiederkehrendes Muster.</a:t>
+              <a:t>jede Seite enthält mehrere Schritte</a:t>
             </a:r>
           </a:p>
           <a:p>
             <a:pPr>
               <a:spcAft>
-                <a:spcPts val="800"/>
+                <a:spcPts val="700"/>
               </a:spcAft>
               <a:defRPr sz="1900">
                 <a:solidFill>
-                  <a:srgbClr val="232323"/>
+                  <a:srgbClr val="1E1E1E"/>
                 </a:solidFill>
               </a:defRPr>
             </a:pPr>
             <a:r>
-              <a:t>Dafür gibt es eine Wiederholung.</a:t>
+              <a:t>äußere Wiederholung: vier Seiten</a:t>
+            </a:r>
+          </a:p>
+          <a:p>
+            <a:pPr>
+              <a:spcAft>
+                <a:spcPts val="700"/>
+              </a:spcAft>
+              <a:defRPr sz="1900">
+                <a:solidFill>
+                  <a:srgbClr val="1E1E1E"/>
+                </a:solidFill>
+              </a:defRPr>
+            </a:pPr>
+            <a:r>
+              <a:t>innere Wiederholung: Seitenlänge</a:t>
             </a:r>
           </a:p>
         </p:txBody>
@@ -8239,18 +6859,18 @@
         </p:nvSpPr>
         <p:spPr>
           <a:xfrm>
-            <a:off x="6675120" y="1143000"/>
-            <a:ext cx="4114800" cy="4389120"/>
-          </a:xfrm>
-          <a:prstGeom prst="rect">
-            <a:avLst/>
-          </a:prstGeom>
-          <a:solidFill>
-            <a:srgbClr val="FAFAFA"/>
+            <a:off x="6217920" y="1188720"/>
+            <a:ext cx="5120640" cy="4023360"/>
+          </a:xfrm>
+          <a:prstGeom prst="rect">
+            <a:avLst/>
+          </a:prstGeom>
+          <a:solidFill>
+            <a:srgbClr val="FCFCFC"/>
           </a:solidFill>
           <a:ln>
             <a:solidFill>
-              <a:srgbClr val="646464"/>
+              <a:srgbClr val="6E6E6E"/>
             </a:solidFill>
           </a:ln>
         </p:spPr>
@@ -8274,22 +6894,18 @@
           <a:p>
             <a:pPr algn="ctr"/>
             <a:r>
-              <a:rPr sz="1300">
+              <a:rPr sz="1400">
                 <a:solidFill>
-                  <a:srgbClr val="232323"/>
+                  <a:srgbClr val="1E1E1E"/>
                 </a:solidFill>
                 <a:latin typeface="Consolas"/>
               </a:rPr>
-              <a:t>Schritt
-Schritt
-Schritt
-Schritt
-Schritt
-Schritt
-Schritt
-Schritt
-Schritt
-Schritt</a:t>
+              <a:t>wiederhole 4 mal
+    wiederhole 4 mal
+        Schritt
+    *wiederhole
+    LinksDrehen
+*wiederhole</a:t>
             </a:r>
           </a:p>
         </p:txBody>
@@ -8302,8 +6918,8 @@
         </p:nvSpPr>
         <p:spPr>
           <a:xfrm>
-            <a:off x="502920" y="6510528"/>
-            <a:ext cx="11064240" cy="182880"/>
+            <a:off x="365760" y="6510528"/>
+            <a:ext cx="11430000" cy="228600"/>
           </a:xfrm>
           <a:prstGeom prst="rect">
             <a:avLst/>
@@ -8320,7 +6936,7 @@
             <a:r>
               <a:rPr sz="800">
                 <a:solidFill>
-                  <a:srgbClr val="646464"/>
+                  <a:srgbClr val="6E6E6E"/>
                 </a:solidFill>
               </a:rPr>
               <a:t>Grafik: eigene Darstellung</a:t>
@@ -8355,13 +6971,13 @@
         <p:spPr>
           <a:xfrm>
             <a:off x="0" y="0"/>
-            <a:ext cx="12191695" cy="100584"/>
-          </a:xfrm>
-          <a:prstGeom prst="rect">
-            <a:avLst/>
-          </a:prstGeom>
-          <a:solidFill>
-            <a:srgbClr val="4472C4"/>
+            <a:ext cx="12191695" cy="109728"/>
+          </a:xfrm>
+          <a:prstGeom prst="rect">
+            <a:avLst/>
+          </a:prstGeom>
+          <a:solidFill>
+            <a:srgbClr val="305396"/>
           </a:solidFill>
           <a:ln>
             <a:noFill/>
@@ -8398,7 +7014,7 @@
         <p:spPr>
           <a:xfrm>
             <a:off x="594360" y="320040"/>
-            <a:ext cx="10972800" cy="502920"/>
+            <a:ext cx="10972800" cy="548640"/>
           </a:xfrm>
           <a:prstGeom prst="rect">
             <a:avLst/>
@@ -8414,10 +7030,10 @@
             <a:r>
               <a:rPr sz="2600" b="1">
                 <a:solidFill>
-                  <a:srgbClr val="1F374E"/>
+                  <a:srgbClr val="202C3C"/>
                 </a:solidFill>
               </a:rPr>
-              <a:t>Lösung: Wiederholung</a:t>
+              <a:t>Fehler sind Informationen</a:t>
             </a:r>
           </a:p>
         </p:txBody>
@@ -8431,7 +7047,7 @@
         <p:spPr>
           <a:xfrm>
             <a:off x="685800" y="1234440"/>
-            <a:ext cx="5303520" cy="4937760"/>
+            <a:ext cx="5394960" cy="5029200"/>
           </a:xfrm>
           <a:prstGeom prst="rect">
             <a:avLst/>
@@ -8446,70 +7062,100 @@
           <a:p>
             <a:pPr>
               <a:spcAft>
-                <a:spcPts val="800"/>
+                <a:spcPts val="700"/>
               </a:spcAft>
               <a:defRPr sz="1900">
                 <a:solidFill>
-                  <a:srgbClr val="232323"/>
+                  <a:srgbClr val="1E1E1E"/>
                 </a:solidFill>
               </a:defRPr>
             </a:pPr>
             <a:r>
-              <a:t>Die Anzahl ist vorher bekannt: 10 Schritte.</a:t>
+              <a:t>Beobachten</a:t>
             </a:r>
           </a:p>
           <a:p>
             <a:pPr>
               <a:spcAft>
-                <a:spcPts val="800"/>
+                <a:spcPts val="700"/>
               </a:spcAft>
               <a:defRPr sz="1900">
                 <a:solidFill>
-                  <a:srgbClr val="232323"/>
+                  <a:srgbClr val="1E1E1E"/>
                 </a:solidFill>
               </a:defRPr>
             </a:pPr>
             <a:r>
-              <a:t>Der Wiederholungsblock wird genau zehnmal ausgeführt.</a:t>
+              <a:t>Eingrenzen</a:t>
             </a:r>
           </a:p>
           <a:p>
             <a:pPr>
               <a:spcAft>
-                <a:spcPts val="800"/>
+                <a:spcPts val="700"/>
               </a:spcAft>
               <a:defRPr sz="1900">
                 <a:solidFill>
-                  <a:srgbClr val="232323"/>
+                  <a:srgbClr val="1E1E1E"/>
                 </a:solidFill>
               </a:defRPr>
             </a:pPr>
             <a:r>
-              <a:t>Der Code wird kürzer und leichter änderbar.</a:t>
-            </a:r>
-          </a:p>
-        </p:txBody>
-      </p:sp>
-      <p:sp>
-        <p:nvSpPr>
-          <p:cNvPr id="5" name="Rectangle 4"/>
+              <a:t>Ändern</a:t>
+            </a:r>
+          </a:p>
+          <a:p>
+            <a:pPr>
+              <a:spcAft>
+                <a:spcPts val="700"/>
+              </a:spcAft>
+              <a:defRPr sz="1900">
+                <a:solidFill>
+                  <a:srgbClr val="1E1E1E"/>
+                </a:solidFill>
+              </a:defRPr>
+            </a:pPr>
+            <a:r>
+              <a:t>Testen</a:t>
+            </a:r>
+          </a:p>
+          <a:p>
+            <a:pPr>
+              <a:spcAft>
+                <a:spcPts val="700"/>
+              </a:spcAft>
+              <a:defRPr sz="1900">
+                <a:solidFill>
+                  <a:srgbClr val="1E1E1E"/>
+                </a:solidFill>
+              </a:defRPr>
+            </a:pPr>
+            <a:r>
+              <a:t>Zyklus wiederholen</a:t>
+            </a:r>
+          </a:p>
+        </p:txBody>
+      </p:sp>
+      <p:sp>
+        <p:nvSpPr>
+          <p:cNvPr id="5" name="Rounded Rectangle 4"/>
           <p:cNvSpPr/>
           <p:nvPr/>
         </p:nvSpPr>
         <p:spPr>
           <a:xfrm>
-            <a:off x="6400800" y="1463040"/>
-            <a:ext cx="4754880" cy="2194560"/>
-          </a:xfrm>
-          <a:prstGeom prst="rect">
-            <a:avLst/>
-          </a:prstGeom>
-          <a:solidFill>
-            <a:srgbClr val="FAFAFA"/>
+            <a:off x="6766560" y="1463040"/>
+            <a:ext cx="1920240" cy="685800"/>
+          </a:xfrm>
+          <a:prstGeom prst="roundRect">
+            <a:avLst/>
+          </a:prstGeom>
+          <a:solidFill>
+            <a:srgbClr val="FFE899"/>
           </a:solidFill>
           <a:ln>
             <a:solidFill>
-              <a:srgbClr val="646464"/>
+              <a:srgbClr val="305396"/>
             </a:solidFill>
           </a:ln>
         </p:spPr>
@@ -8528,34 +7174,243 @@
           </a:fontRef>
         </p:style>
         <p:txBody>
-          <a:bodyPr rtlCol="0" anchor="ctr" wrap="none"/>
+          <a:bodyPr rtlCol="0" anchor="ctr" wrap="square"/>
           <a:lstStyle/>
           <a:p>
             <a:pPr algn="ctr"/>
             <a:r>
-              <a:rPr sz="1800">
+              <a:rPr sz="1300" b="1">
                 <a:solidFill>
-                  <a:srgbClr val="232323"/>
+                  <a:srgbClr val="202C3C"/>
                 </a:solidFill>
-                <a:latin typeface="Consolas"/>
               </a:rPr>
-              <a:t>wiederhole 10 mal
-    Schritt
-*wiederhole</a:t>
-            </a:r>
-          </a:p>
-        </p:txBody>
-      </p:sp>
-      <p:sp>
-        <p:nvSpPr>
-          <p:cNvPr id="6" name="TextBox 5"/>
+              <a:t>Beobachten</a:t>
+            </a:r>
+          </a:p>
+        </p:txBody>
+      </p:sp>
+      <p:sp>
+        <p:nvSpPr>
+          <p:cNvPr id="6" name="Rounded Rectangle 5"/>
+          <p:cNvSpPr/>
+          <p:nvPr/>
+        </p:nvSpPr>
+        <p:spPr>
+          <a:xfrm>
+            <a:off x="9326880" y="1463040"/>
+            <a:ext cx="1920240" cy="685800"/>
+          </a:xfrm>
+          <a:prstGeom prst="roundRect">
+            <a:avLst/>
+          </a:prstGeom>
+          <a:solidFill>
+            <a:srgbClr val="E5ECF6"/>
+          </a:solidFill>
+          <a:ln>
+            <a:solidFill>
+              <a:srgbClr val="305396"/>
+            </a:solidFill>
+          </a:ln>
+        </p:spPr>
+        <p:style>
+          <a:lnRef idx="1">
+            <a:schemeClr val="accent1"/>
+          </a:lnRef>
+          <a:fillRef idx="3">
+            <a:schemeClr val="accent1"/>
+          </a:fillRef>
+          <a:effectRef idx="2">
+            <a:schemeClr val="accent1"/>
+          </a:effectRef>
+          <a:fontRef idx="minor">
+            <a:schemeClr val="lt1"/>
+          </a:fontRef>
+        </p:style>
+        <p:txBody>
+          <a:bodyPr rtlCol="0" anchor="ctr" wrap="square"/>
+          <a:lstStyle/>
+          <a:p>
+            <a:pPr algn="ctr"/>
+            <a:r>
+              <a:rPr sz="1300" b="1">
+                <a:solidFill>
+                  <a:srgbClr val="202C3C"/>
+                </a:solidFill>
+              </a:rPr>
+              <a:t>Eingrenzen</a:t>
+            </a:r>
+          </a:p>
+        </p:txBody>
+      </p:sp>
+      <p:sp>
+        <p:nvSpPr>
+          <p:cNvPr id="7" name="Rounded Rectangle 6"/>
+          <p:cNvSpPr/>
+          <p:nvPr/>
+        </p:nvSpPr>
+        <p:spPr>
+          <a:xfrm>
+            <a:off x="6766560" y="3383280"/>
+            <a:ext cx="1920240" cy="685800"/>
+          </a:xfrm>
+          <a:prstGeom prst="roundRect">
+            <a:avLst/>
+          </a:prstGeom>
+          <a:solidFill>
+            <a:srgbClr val="FFE899"/>
+          </a:solidFill>
+          <a:ln>
+            <a:solidFill>
+              <a:srgbClr val="305396"/>
+            </a:solidFill>
+          </a:ln>
+        </p:spPr>
+        <p:style>
+          <a:lnRef idx="1">
+            <a:schemeClr val="accent1"/>
+          </a:lnRef>
+          <a:fillRef idx="3">
+            <a:schemeClr val="accent1"/>
+          </a:fillRef>
+          <a:effectRef idx="2">
+            <a:schemeClr val="accent1"/>
+          </a:effectRef>
+          <a:fontRef idx="minor">
+            <a:schemeClr val="lt1"/>
+          </a:fontRef>
+        </p:style>
+        <p:txBody>
+          <a:bodyPr rtlCol="0" anchor="ctr" wrap="square"/>
+          <a:lstStyle/>
+          <a:p>
+            <a:pPr algn="ctr"/>
+            <a:r>
+              <a:rPr sz="1300" b="1">
+                <a:solidFill>
+                  <a:srgbClr val="202C3C"/>
+                </a:solidFill>
+              </a:rPr>
+              <a:t>Ändern</a:t>
+            </a:r>
+          </a:p>
+        </p:txBody>
+      </p:sp>
+      <p:sp>
+        <p:nvSpPr>
+          <p:cNvPr id="8" name="Rounded Rectangle 7"/>
+          <p:cNvSpPr/>
+          <p:nvPr/>
+        </p:nvSpPr>
+        <p:spPr>
+          <a:xfrm>
+            <a:off x="9326880" y="3383280"/>
+            <a:ext cx="1920240" cy="685800"/>
+          </a:xfrm>
+          <a:prstGeom prst="roundRect">
+            <a:avLst/>
+          </a:prstGeom>
+          <a:solidFill>
+            <a:srgbClr val="E5ECF6"/>
+          </a:solidFill>
+          <a:ln>
+            <a:solidFill>
+              <a:srgbClr val="305396"/>
+            </a:solidFill>
+          </a:ln>
+        </p:spPr>
+        <p:style>
+          <a:lnRef idx="1">
+            <a:schemeClr val="accent1"/>
+          </a:lnRef>
+          <a:fillRef idx="3">
+            <a:schemeClr val="accent1"/>
+          </a:fillRef>
+          <a:effectRef idx="2">
+            <a:schemeClr val="accent1"/>
+          </a:effectRef>
+          <a:fontRef idx="minor">
+            <a:schemeClr val="lt1"/>
+          </a:fontRef>
+        </p:style>
+        <p:txBody>
+          <a:bodyPr rtlCol="0" anchor="ctr" wrap="square"/>
+          <a:lstStyle/>
+          <a:p>
+            <a:pPr algn="ctr"/>
+            <a:r>
+              <a:rPr sz="1300" b="1">
+                <a:solidFill>
+                  <a:srgbClr val="202C3C"/>
+                </a:solidFill>
+              </a:rPr>
+              <a:t>Testen</a:t>
+            </a:r>
+          </a:p>
+        </p:txBody>
+      </p:sp>
+      <p:sp>
+        <p:nvSpPr>
+          <p:cNvPr id="9" name="Rounded Rectangle 8"/>
+          <p:cNvSpPr/>
+          <p:nvPr/>
+        </p:nvSpPr>
+        <p:spPr>
+          <a:xfrm>
+            <a:off x="7955279" y="2743200"/>
+            <a:ext cx="2011680" cy="594360"/>
+          </a:xfrm>
+          <a:prstGeom prst="roundRect">
+            <a:avLst/>
+          </a:prstGeom>
+          <a:solidFill>
+            <a:srgbClr val="DDEEDD"/>
+          </a:solidFill>
+          <a:ln>
+            <a:solidFill>
+              <a:srgbClr val="305396"/>
+            </a:solidFill>
+          </a:ln>
+        </p:spPr>
+        <p:style>
+          <a:lnRef idx="1">
+            <a:schemeClr val="accent1"/>
+          </a:lnRef>
+          <a:fillRef idx="3">
+            <a:schemeClr val="accent1"/>
+          </a:fillRef>
+          <a:effectRef idx="2">
+            <a:schemeClr val="accent1"/>
+          </a:effectRef>
+          <a:fontRef idx="minor">
+            <a:schemeClr val="lt1"/>
+          </a:fontRef>
+        </p:style>
+        <p:txBody>
+          <a:bodyPr rtlCol="0" anchor="ctr" wrap="square"/>
+          <a:lstStyle/>
+          <a:p>
+            <a:pPr algn="ctr"/>
+            <a:r>
+              <a:rPr sz="1300" b="1">
+                <a:solidFill>
+                  <a:srgbClr val="202C3C"/>
+                </a:solidFill>
+              </a:rPr>
+              <a:t>Debugging-Zyklus</a:t>
+            </a:r>
+          </a:p>
+        </p:txBody>
+      </p:sp>
+      <p:sp>
+        <p:nvSpPr>
+          <p:cNvPr id="10" name="TextBox 9"/>
           <p:cNvSpPr txBox="1"/>
           <p:nvPr/>
         </p:nvSpPr>
         <p:spPr>
           <a:xfrm>
-            <a:off x="502920" y="6510528"/>
-            <a:ext cx="11064240" cy="182880"/>
+            <a:off x="365760" y="6510528"/>
+            <a:ext cx="11430000" cy="228600"/>
           </a:xfrm>
           <a:prstGeom prst="rect">
             <a:avLst/>
@@ -8572,7 +7427,7 @@
             <a:r>
               <a:rPr sz="800">
                 <a:solidFill>
-                  <a:srgbClr val="646464"/>
+                  <a:srgbClr val="6E6E6E"/>
                 </a:solidFill>
               </a:rPr>
               <a:t>Grafik: eigene Darstellung</a:t>
@@ -8607,13 +7462,13 @@
         <p:spPr>
           <a:xfrm>
             <a:off x="0" y="0"/>
-            <a:ext cx="12191695" cy="100584"/>
-          </a:xfrm>
-          <a:prstGeom prst="rect">
-            <a:avLst/>
-          </a:prstGeom>
-          <a:solidFill>
-            <a:srgbClr val="4472C4"/>
+            <a:ext cx="12191695" cy="109728"/>
+          </a:xfrm>
+          <a:prstGeom prst="rect">
+            <a:avLst/>
+          </a:prstGeom>
+          <a:solidFill>
+            <a:srgbClr val="305396"/>
           </a:solidFill>
           <a:ln>
             <a:noFill/>
@@ -8650,7 +7505,7 @@
         <p:spPr>
           <a:xfrm>
             <a:off x="594360" y="320040"/>
-            <a:ext cx="10972800" cy="502920"/>
+            <a:ext cx="10972800" cy="548640"/>
           </a:xfrm>
           <a:prstGeom prst="rect">
             <a:avLst/>
@@ -8666,10 +7521,10 @@
             <a:r>
               <a:rPr sz="2600" b="1">
                 <a:solidFill>
-                  <a:srgbClr val="1F374E"/>
+                  <a:srgbClr val="202C3C"/>
                 </a:solidFill>
               </a:rPr>
-              <a:t>Quadrat mit Wiederholung</a:t>
+              <a:t>Konkrete Testfälle</a:t>
             </a:r>
           </a:p>
         </p:txBody>
@@ -8683,7 +7538,7 @@
         <p:spPr>
           <a:xfrm>
             <a:off x="685800" y="1234440"/>
-            <a:ext cx="5303520" cy="4937760"/>
+            <a:ext cx="5394960" cy="5029200"/>
           </a:xfrm>
           <a:prstGeom prst="rect">
             <a:avLst/>
@@ -8698,46 +7553,61 @@
           <a:p>
             <a:pPr>
               <a:spcAft>
-                <a:spcPts val="800"/>
+                <a:spcPts val="700"/>
               </a:spcAft>
               <a:defRPr sz="1900">
                 <a:solidFill>
-                  <a:srgbClr val="232323"/>
+                  <a:srgbClr val="1E1E1E"/>
                 </a:solidFill>
               </a:defRPr>
             </a:pPr>
             <a:r>
-              <a:t>Ein Quadrat hat vier Seiten.</a:t>
+              <a:t>Wand nach 3 Kacheln</a:t>
             </a:r>
           </a:p>
           <a:p>
             <a:pPr>
               <a:spcAft>
-                <a:spcPts val="800"/>
+                <a:spcPts val="700"/>
               </a:spcAft>
               <a:defRPr sz="1900">
                 <a:solidFill>
-                  <a:srgbClr val="232323"/>
+                  <a:srgbClr val="1E1E1E"/>
                 </a:solidFill>
               </a:defRPr>
             </a:pPr>
             <a:r>
-              <a:t>Für jede Seite wiederholt sich derselbe Ablauf.</a:t>
+              <a:t>Wand direkt vor Karol</a:t>
             </a:r>
           </a:p>
           <a:p>
             <a:pPr>
               <a:spcAft>
-                <a:spcPts val="800"/>
+                <a:spcPts val="700"/>
               </a:spcAft>
               <a:defRPr sz="1900">
                 <a:solidFill>
-                  <a:srgbClr val="232323"/>
+                  <a:srgbClr val="1E1E1E"/>
                 </a:solidFill>
               </a:defRPr>
             </a:pPr>
             <a:r>
-              <a:t>Die Seitenlänge kann ebenfalls durch eine Wiederholung erzeugt werden.</a:t>
+              <a:t>6 freie Kacheln</a:t>
+            </a:r>
+          </a:p>
+          <a:p>
+            <a:pPr>
+              <a:spcAft>
+                <a:spcPts val="700"/>
+              </a:spcAft>
+              <a:defRPr sz="1900">
+                <a:solidFill>
+                  <a:srgbClr val="1E1E1E"/>
+                </a:solidFill>
+              </a:defRPr>
+            </a:pPr>
+            <a:r>
+              <a:t>Startposition verändert</a:t>
             </a:r>
           </a:p>
         </p:txBody>
@@ -8750,18 +7620,18 @@
         </p:nvSpPr>
         <p:spPr>
           <a:xfrm>
-            <a:off x="6217920" y="1234440"/>
-            <a:ext cx="5029200" cy="4023360"/>
-          </a:xfrm>
-          <a:prstGeom prst="rect">
-            <a:avLst/>
-          </a:prstGeom>
-          <a:solidFill>
-            <a:srgbClr val="FAFAFA"/>
+            <a:off x="7040880" y="1554480"/>
+            <a:ext cx="530352" cy="530352"/>
+          </a:xfrm>
+          <a:prstGeom prst="rect">
+            <a:avLst/>
+          </a:prstGeom>
+          <a:solidFill>
+            <a:srgbClr val="FFFFFF"/>
           </a:solidFill>
           <a:ln>
             <a:solidFill>
-              <a:srgbClr val="646464"/>
+              <a:srgbClr val="6E6E6E"/>
             </a:solidFill>
           </a:ln>
         </p:spPr>
@@ -8780,37 +7650,751 @@
           </a:fontRef>
         </p:style>
         <p:txBody>
-          <a:bodyPr rtlCol="0" anchor="ctr" wrap="none"/>
+          <a:bodyPr rtlCol="0" anchor="ctr"/>
           <a:lstStyle/>
           <a:p>
             <a:pPr algn="ctr"/>
-            <a:r>
-              <a:rPr sz="1400">
+          </a:p>
+        </p:txBody>
+      </p:sp>
+      <p:sp>
+        <p:nvSpPr>
+          <p:cNvPr id="6" name="Rectangle 5"/>
+          <p:cNvSpPr/>
+          <p:nvPr/>
+        </p:nvSpPr>
+        <p:spPr>
+          <a:xfrm>
+            <a:off x="7607808" y="1554480"/>
+            <a:ext cx="530352" cy="530352"/>
+          </a:xfrm>
+          <a:prstGeom prst="rect">
+            <a:avLst/>
+          </a:prstGeom>
+          <a:solidFill>
+            <a:srgbClr val="FFFFFF"/>
+          </a:solidFill>
+          <a:ln>
+            <a:solidFill>
+              <a:srgbClr val="6E6E6E"/>
+            </a:solidFill>
+          </a:ln>
+        </p:spPr>
+        <p:style>
+          <a:lnRef idx="1">
+            <a:schemeClr val="accent1"/>
+          </a:lnRef>
+          <a:fillRef idx="3">
+            <a:schemeClr val="accent1"/>
+          </a:fillRef>
+          <a:effectRef idx="2">
+            <a:schemeClr val="accent1"/>
+          </a:effectRef>
+          <a:fontRef idx="minor">
+            <a:schemeClr val="lt1"/>
+          </a:fontRef>
+        </p:style>
+        <p:txBody>
+          <a:bodyPr rtlCol="0" anchor="ctr"/>
+          <a:lstStyle/>
+          <a:p>
+            <a:pPr algn="ctr"/>
+          </a:p>
+        </p:txBody>
+      </p:sp>
+      <p:sp>
+        <p:nvSpPr>
+          <p:cNvPr id="7" name="Rectangle 6"/>
+          <p:cNvSpPr/>
+          <p:nvPr/>
+        </p:nvSpPr>
+        <p:spPr>
+          <a:xfrm>
+            <a:off x="8174736" y="1554480"/>
+            <a:ext cx="530352" cy="530352"/>
+          </a:xfrm>
+          <a:prstGeom prst="rect">
+            <a:avLst/>
+          </a:prstGeom>
+          <a:solidFill>
+            <a:srgbClr val="FFFFFF"/>
+          </a:solidFill>
+          <a:ln>
+            <a:solidFill>
+              <a:srgbClr val="6E6E6E"/>
+            </a:solidFill>
+          </a:ln>
+        </p:spPr>
+        <p:style>
+          <a:lnRef idx="1">
+            <a:schemeClr val="accent1"/>
+          </a:lnRef>
+          <a:fillRef idx="3">
+            <a:schemeClr val="accent1"/>
+          </a:fillRef>
+          <a:effectRef idx="2">
+            <a:schemeClr val="accent1"/>
+          </a:effectRef>
+          <a:fontRef idx="minor">
+            <a:schemeClr val="lt1"/>
+          </a:fontRef>
+        </p:style>
+        <p:txBody>
+          <a:bodyPr rtlCol="0" anchor="ctr"/>
+          <a:lstStyle/>
+          <a:p>
+            <a:pPr algn="ctr"/>
+          </a:p>
+        </p:txBody>
+      </p:sp>
+      <p:sp>
+        <p:nvSpPr>
+          <p:cNvPr id="8" name="Rectangle 7"/>
+          <p:cNvSpPr/>
+          <p:nvPr/>
+        </p:nvSpPr>
+        <p:spPr>
+          <a:xfrm>
+            <a:off x="8741664" y="1554480"/>
+            <a:ext cx="530352" cy="530352"/>
+          </a:xfrm>
+          <a:prstGeom prst="rect">
+            <a:avLst/>
+          </a:prstGeom>
+          <a:solidFill>
+            <a:srgbClr val="FFFFFF"/>
+          </a:solidFill>
+          <a:ln>
+            <a:solidFill>
+              <a:srgbClr val="6E6E6E"/>
+            </a:solidFill>
+          </a:ln>
+        </p:spPr>
+        <p:style>
+          <a:lnRef idx="1">
+            <a:schemeClr val="accent1"/>
+          </a:lnRef>
+          <a:fillRef idx="3">
+            <a:schemeClr val="accent1"/>
+          </a:fillRef>
+          <a:effectRef idx="2">
+            <a:schemeClr val="accent1"/>
+          </a:effectRef>
+          <a:fontRef idx="minor">
+            <a:schemeClr val="lt1"/>
+          </a:fontRef>
+        </p:style>
+        <p:txBody>
+          <a:bodyPr rtlCol="0" anchor="ctr"/>
+          <a:lstStyle/>
+          <a:p>
+            <a:pPr algn="ctr"/>
+          </a:p>
+        </p:txBody>
+      </p:sp>
+      <p:sp>
+        <p:nvSpPr>
+          <p:cNvPr id="9" name="Rectangle 8"/>
+          <p:cNvSpPr/>
+          <p:nvPr/>
+        </p:nvSpPr>
+        <p:spPr>
+          <a:xfrm>
+            <a:off x="7040880" y="2121408"/>
+            <a:ext cx="530352" cy="530352"/>
+          </a:xfrm>
+          <a:prstGeom prst="rect">
+            <a:avLst/>
+          </a:prstGeom>
+          <a:solidFill>
+            <a:srgbClr val="FFFFFF"/>
+          </a:solidFill>
+          <a:ln>
+            <a:solidFill>
+              <a:srgbClr val="6E6E6E"/>
+            </a:solidFill>
+          </a:ln>
+        </p:spPr>
+        <p:style>
+          <a:lnRef idx="1">
+            <a:schemeClr val="accent1"/>
+          </a:lnRef>
+          <a:fillRef idx="3">
+            <a:schemeClr val="accent1"/>
+          </a:fillRef>
+          <a:effectRef idx="2">
+            <a:schemeClr val="accent1"/>
+          </a:effectRef>
+          <a:fontRef idx="minor">
+            <a:schemeClr val="lt1"/>
+          </a:fontRef>
+        </p:style>
+        <p:txBody>
+          <a:bodyPr rtlCol="0" anchor="ctr"/>
+          <a:lstStyle/>
+          <a:p>
+            <a:pPr algn="ctr"/>
+          </a:p>
+        </p:txBody>
+      </p:sp>
+      <p:sp>
+        <p:nvSpPr>
+          <p:cNvPr id="10" name="Rectangle 9"/>
+          <p:cNvSpPr/>
+          <p:nvPr/>
+        </p:nvSpPr>
+        <p:spPr>
+          <a:xfrm>
+            <a:off x="7607808" y="2121408"/>
+            <a:ext cx="530352" cy="530352"/>
+          </a:xfrm>
+          <a:prstGeom prst="rect">
+            <a:avLst/>
+          </a:prstGeom>
+          <a:solidFill>
+            <a:srgbClr val="FFFFFF"/>
+          </a:solidFill>
+          <a:ln>
+            <a:solidFill>
+              <a:srgbClr val="6E6E6E"/>
+            </a:solidFill>
+          </a:ln>
+        </p:spPr>
+        <p:style>
+          <a:lnRef idx="1">
+            <a:schemeClr val="accent1"/>
+          </a:lnRef>
+          <a:fillRef idx="3">
+            <a:schemeClr val="accent1"/>
+          </a:fillRef>
+          <a:effectRef idx="2">
+            <a:schemeClr val="accent1"/>
+          </a:effectRef>
+          <a:fontRef idx="minor">
+            <a:schemeClr val="lt1"/>
+          </a:fontRef>
+        </p:style>
+        <p:txBody>
+          <a:bodyPr rtlCol="0" anchor="ctr"/>
+          <a:lstStyle/>
+          <a:p>
+            <a:pPr algn="ctr"/>
+          </a:p>
+        </p:txBody>
+      </p:sp>
+      <p:sp>
+        <p:nvSpPr>
+          <p:cNvPr id="11" name="Rectangle 10"/>
+          <p:cNvSpPr/>
+          <p:nvPr/>
+        </p:nvSpPr>
+        <p:spPr>
+          <a:xfrm>
+            <a:off x="8174736" y="2121408"/>
+            <a:ext cx="530352" cy="530352"/>
+          </a:xfrm>
+          <a:prstGeom prst="rect">
+            <a:avLst/>
+          </a:prstGeom>
+          <a:solidFill>
+            <a:srgbClr val="FFFFFF"/>
+          </a:solidFill>
+          <a:ln>
+            <a:solidFill>
+              <a:srgbClr val="6E6E6E"/>
+            </a:solidFill>
+          </a:ln>
+        </p:spPr>
+        <p:style>
+          <a:lnRef idx="1">
+            <a:schemeClr val="accent1"/>
+          </a:lnRef>
+          <a:fillRef idx="3">
+            <a:schemeClr val="accent1"/>
+          </a:fillRef>
+          <a:effectRef idx="2">
+            <a:schemeClr val="accent1"/>
+          </a:effectRef>
+          <a:fontRef idx="minor">
+            <a:schemeClr val="lt1"/>
+          </a:fontRef>
+        </p:style>
+        <p:txBody>
+          <a:bodyPr rtlCol="0" anchor="ctr"/>
+          <a:lstStyle/>
+          <a:p>
+            <a:pPr algn="ctr"/>
+          </a:p>
+        </p:txBody>
+      </p:sp>
+      <p:sp>
+        <p:nvSpPr>
+          <p:cNvPr id="12" name="Rectangle 11"/>
+          <p:cNvSpPr/>
+          <p:nvPr/>
+        </p:nvSpPr>
+        <p:spPr>
+          <a:xfrm>
+            <a:off x="8741664" y="2121408"/>
+            <a:ext cx="530352" cy="530352"/>
+          </a:xfrm>
+          <a:prstGeom prst="rect">
+            <a:avLst/>
+          </a:prstGeom>
+          <a:solidFill>
+            <a:srgbClr val="FFFFFF"/>
+          </a:solidFill>
+          <a:ln>
+            <a:solidFill>
+              <a:srgbClr val="6E6E6E"/>
+            </a:solidFill>
+          </a:ln>
+        </p:spPr>
+        <p:style>
+          <a:lnRef idx="1">
+            <a:schemeClr val="accent1"/>
+          </a:lnRef>
+          <a:fillRef idx="3">
+            <a:schemeClr val="accent1"/>
+          </a:fillRef>
+          <a:effectRef idx="2">
+            <a:schemeClr val="accent1"/>
+          </a:effectRef>
+          <a:fontRef idx="minor">
+            <a:schemeClr val="lt1"/>
+          </a:fontRef>
+        </p:style>
+        <p:txBody>
+          <a:bodyPr rtlCol="0" anchor="ctr"/>
+          <a:lstStyle/>
+          <a:p>
+            <a:pPr algn="ctr"/>
+          </a:p>
+        </p:txBody>
+      </p:sp>
+      <p:sp>
+        <p:nvSpPr>
+          <p:cNvPr id="13" name="Rectangle 12"/>
+          <p:cNvSpPr/>
+          <p:nvPr/>
+        </p:nvSpPr>
+        <p:spPr>
+          <a:xfrm>
+            <a:off x="7040880" y="2688336"/>
+            <a:ext cx="530352" cy="530352"/>
+          </a:xfrm>
+          <a:prstGeom prst="rect">
+            <a:avLst/>
+          </a:prstGeom>
+          <a:solidFill>
+            <a:srgbClr val="FFFFFF"/>
+          </a:solidFill>
+          <a:ln>
+            <a:solidFill>
+              <a:srgbClr val="6E6E6E"/>
+            </a:solidFill>
+          </a:ln>
+        </p:spPr>
+        <p:style>
+          <a:lnRef idx="1">
+            <a:schemeClr val="accent1"/>
+          </a:lnRef>
+          <a:fillRef idx="3">
+            <a:schemeClr val="accent1"/>
+          </a:fillRef>
+          <a:effectRef idx="2">
+            <a:schemeClr val="accent1"/>
+          </a:effectRef>
+          <a:fontRef idx="minor">
+            <a:schemeClr val="lt1"/>
+          </a:fontRef>
+        </p:style>
+        <p:txBody>
+          <a:bodyPr rtlCol="0" anchor="ctr"/>
+          <a:lstStyle/>
+          <a:p>
+            <a:pPr algn="ctr"/>
+          </a:p>
+        </p:txBody>
+      </p:sp>
+      <p:sp>
+        <p:nvSpPr>
+          <p:cNvPr id="14" name="Rectangle 13"/>
+          <p:cNvSpPr/>
+          <p:nvPr/>
+        </p:nvSpPr>
+        <p:spPr>
+          <a:xfrm>
+            <a:off x="7607808" y="2688336"/>
+            <a:ext cx="530352" cy="530352"/>
+          </a:xfrm>
+          <a:prstGeom prst="rect">
+            <a:avLst/>
+          </a:prstGeom>
+          <a:solidFill>
+            <a:srgbClr val="FFFFFF"/>
+          </a:solidFill>
+          <a:ln>
+            <a:solidFill>
+              <a:srgbClr val="6E6E6E"/>
+            </a:solidFill>
+          </a:ln>
+        </p:spPr>
+        <p:style>
+          <a:lnRef idx="1">
+            <a:schemeClr val="accent1"/>
+          </a:lnRef>
+          <a:fillRef idx="3">
+            <a:schemeClr val="accent1"/>
+          </a:fillRef>
+          <a:effectRef idx="2">
+            <a:schemeClr val="accent1"/>
+          </a:effectRef>
+          <a:fontRef idx="minor">
+            <a:schemeClr val="lt1"/>
+          </a:fontRef>
+        </p:style>
+        <p:txBody>
+          <a:bodyPr rtlCol="0" anchor="ctr"/>
+          <a:lstStyle/>
+          <a:p>
+            <a:pPr algn="ctr"/>
+          </a:p>
+        </p:txBody>
+      </p:sp>
+      <p:sp>
+        <p:nvSpPr>
+          <p:cNvPr id="15" name="Rectangle 14"/>
+          <p:cNvSpPr/>
+          <p:nvPr/>
+        </p:nvSpPr>
+        <p:spPr>
+          <a:xfrm>
+            <a:off x="8174736" y="2688336"/>
+            <a:ext cx="530352" cy="530352"/>
+          </a:xfrm>
+          <a:prstGeom prst="rect">
+            <a:avLst/>
+          </a:prstGeom>
+          <a:solidFill>
+            <a:srgbClr val="FFFFFF"/>
+          </a:solidFill>
+          <a:ln>
+            <a:solidFill>
+              <a:srgbClr val="6E6E6E"/>
+            </a:solidFill>
+          </a:ln>
+        </p:spPr>
+        <p:style>
+          <a:lnRef idx="1">
+            <a:schemeClr val="accent1"/>
+          </a:lnRef>
+          <a:fillRef idx="3">
+            <a:schemeClr val="accent1"/>
+          </a:fillRef>
+          <a:effectRef idx="2">
+            <a:schemeClr val="accent1"/>
+          </a:effectRef>
+          <a:fontRef idx="minor">
+            <a:schemeClr val="lt1"/>
+          </a:fontRef>
+        </p:style>
+        <p:txBody>
+          <a:bodyPr rtlCol="0" anchor="ctr"/>
+          <a:lstStyle/>
+          <a:p>
+            <a:pPr algn="ctr"/>
+          </a:p>
+        </p:txBody>
+      </p:sp>
+      <p:sp>
+        <p:nvSpPr>
+          <p:cNvPr id="16" name="Rectangle 15"/>
+          <p:cNvSpPr/>
+          <p:nvPr/>
+        </p:nvSpPr>
+        <p:spPr>
+          <a:xfrm>
+            <a:off x="8741664" y="2688336"/>
+            <a:ext cx="530352" cy="530352"/>
+          </a:xfrm>
+          <a:prstGeom prst="rect">
+            <a:avLst/>
+          </a:prstGeom>
+          <a:solidFill>
+            <a:srgbClr val="FFFFFF"/>
+          </a:solidFill>
+          <a:ln>
+            <a:solidFill>
+              <a:srgbClr val="6E6E6E"/>
+            </a:solidFill>
+          </a:ln>
+        </p:spPr>
+        <p:style>
+          <a:lnRef idx="1">
+            <a:schemeClr val="accent1"/>
+          </a:lnRef>
+          <a:fillRef idx="3">
+            <a:schemeClr val="accent1"/>
+          </a:fillRef>
+          <a:effectRef idx="2">
+            <a:schemeClr val="accent1"/>
+          </a:effectRef>
+          <a:fontRef idx="minor">
+            <a:schemeClr val="lt1"/>
+          </a:fontRef>
+        </p:style>
+        <p:txBody>
+          <a:bodyPr rtlCol="0" anchor="ctr"/>
+          <a:lstStyle/>
+          <a:p>
+            <a:pPr algn="ctr"/>
+          </a:p>
+        </p:txBody>
+      </p:sp>
+      <p:sp>
+        <p:nvSpPr>
+          <p:cNvPr id="17" name="Rectangle 16"/>
+          <p:cNvSpPr/>
+          <p:nvPr/>
+        </p:nvSpPr>
+        <p:spPr>
+          <a:xfrm>
+            <a:off x="7040880" y="3255263"/>
+            <a:ext cx="530352" cy="530352"/>
+          </a:xfrm>
+          <a:prstGeom prst="rect">
+            <a:avLst/>
+          </a:prstGeom>
+          <a:solidFill>
+            <a:srgbClr val="FFFFFF"/>
+          </a:solidFill>
+          <a:ln>
+            <a:solidFill>
+              <a:srgbClr val="6E6E6E"/>
+            </a:solidFill>
+          </a:ln>
+        </p:spPr>
+        <p:style>
+          <a:lnRef idx="1">
+            <a:schemeClr val="accent1"/>
+          </a:lnRef>
+          <a:fillRef idx="3">
+            <a:schemeClr val="accent1"/>
+          </a:fillRef>
+          <a:effectRef idx="2">
+            <a:schemeClr val="accent1"/>
+          </a:effectRef>
+          <a:fontRef idx="minor">
+            <a:schemeClr val="lt1"/>
+          </a:fontRef>
+        </p:style>
+        <p:txBody>
+          <a:bodyPr rtlCol="0" anchor="ctr"/>
+          <a:lstStyle/>
+          <a:p>
+            <a:pPr algn="ctr"/>
+          </a:p>
+        </p:txBody>
+      </p:sp>
+      <p:sp>
+        <p:nvSpPr>
+          <p:cNvPr id="18" name="Rectangle 17"/>
+          <p:cNvSpPr/>
+          <p:nvPr/>
+        </p:nvSpPr>
+        <p:spPr>
+          <a:xfrm>
+            <a:off x="7607808" y="3255263"/>
+            <a:ext cx="530352" cy="530352"/>
+          </a:xfrm>
+          <a:prstGeom prst="rect">
+            <a:avLst/>
+          </a:prstGeom>
+          <a:solidFill>
+            <a:srgbClr val="FFFFFF"/>
+          </a:solidFill>
+          <a:ln>
+            <a:solidFill>
+              <a:srgbClr val="6E6E6E"/>
+            </a:solidFill>
+          </a:ln>
+        </p:spPr>
+        <p:style>
+          <a:lnRef idx="1">
+            <a:schemeClr val="accent1"/>
+          </a:lnRef>
+          <a:fillRef idx="3">
+            <a:schemeClr val="accent1"/>
+          </a:fillRef>
+          <a:effectRef idx="2">
+            <a:schemeClr val="accent1"/>
+          </a:effectRef>
+          <a:fontRef idx="minor">
+            <a:schemeClr val="lt1"/>
+          </a:fontRef>
+        </p:style>
+        <p:txBody>
+          <a:bodyPr rtlCol="0" anchor="ctr"/>
+          <a:lstStyle/>
+          <a:p>
+            <a:pPr algn="ctr"/>
+          </a:p>
+        </p:txBody>
+      </p:sp>
+      <p:sp>
+        <p:nvSpPr>
+          <p:cNvPr id="19" name="Rectangle 18"/>
+          <p:cNvSpPr/>
+          <p:nvPr/>
+        </p:nvSpPr>
+        <p:spPr>
+          <a:xfrm>
+            <a:off x="8174736" y="3255263"/>
+            <a:ext cx="530352" cy="530352"/>
+          </a:xfrm>
+          <a:prstGeom prst="rect">
+            <a:avLst/>
+          </a:prstGeom>
+          <a:solidFill>
+            <a:srgbClr val="FFFFFF"/>
+          </a:solidFill>
+          <a:ln>
+            <a:solidFill>
+              <a:srgbClr val="6E6E6E"/>
+            </a:solidFill>
+          </a:ln>
+        </p:spPr>
+        <p:style>
+          <a:lnRef idx="1">
+            <a:schemeClr val="accent1"/>
+          </a:lnRef>
+          <a:fillRef idx="3">
+            <a:schemeClr val="accent1"/>
+          </a:fillRef>
+          <a:effectRef idx="2">
+            <a:schemeClr val="accent1"/>
+          </a:effectRef>
+          <a:fontRef idx="minor">
+            <a:schemeClr val="lt1"/>
+          </a:fontRef>
+        </p:style>
+        <p:txBody>
+          <a:bodyPr rtlCol="0" anchor="ctr"/>
+          <a:lstStyle/>
+          <a:p>
+            <a:pPr algn="ctr"/>
+          </a:p>
+        </p:txBody>
+      </p:sp>
+      <p:sp>
+        <p:nvSpPr>
+          <p:cNvPr id="20" name="Rectangle 19"/>
+          <p:cNvSpPr/>
+          <p:nvPr/>
+        </p:nvSpPr>
+        <p:spPr>
+          <a:xfrm>
+            <a:off x="8741664" y="3255263"/>
+            <a:ext cx="530352" cy="530352"/>
+          </a:xfrm>
+          <a:prstGeom prst="rect">
+            <a:avLst/>
+          </a:prstGeom>
+          <a:solidFill>
+            <a:srgbClr val="FFFFFF"/>
+          </a:solidFill>
+          <a:ln>
+            <a:solidFill>
+              <a:srgbClr val="6E6E6E"/>
+            </a:solidFill>
+          </a:ln>
+        </p:spPr>
+        <p:style>
+          <a:lnRef idx="1">
+            <a:schemeClr val="accent1"/>
+          </a:lnRef>
+          <a:fillRef idx="3">
+            <a:schemeClr val="accent1"/>
+          </a:fillRef>
+          <a:effectRef idx="2">
+            <a:schemeClr val="accent1"/>
+          </a:effectRef>
+          <a:fontRef idx="minor">
+            <a:schemeClr val="lt1"/>
+          </a:fontRef>
+        </p:style>
+        <p:txBody>
+          <a:bodyPr rtlCol="0" anchor="ctr"/>
+          <a:lstStyle/>
+          <a:p>
+            <a:pPr algn="ctr"/>
+          </a:p>
+        </p:txBody>
+      </p:sp>
+      <p:sp>
+        <p:nvSpPr>
+          <p:cNvPr id="21" name="Rounded Rectangle 20"/>
+          <p:cNvSpPr/>
+          <p:nvPr/>
+        </p:nvSpPr>
+        <p:spPr>
+          <a:xfrm>
+            <a:off x="6126480" y="2057400"/>
+            <a:ext cx="658368" cy="658368"/>
+          </a:xfrm>
+          <a:prstGeom prst="roundRect">
+            <a:avLst/>
+          </a:prstGeom>
+          <a:solidFill>
+            <a:srgbClr val="FFE899"/>
+          </a:solidFill>
+          <a:ln>
+            <a:solidFill>
+              <a:srgbClr val="305396"/>
+            </a:solidFill>
+          </a:ln>
+        </p:spPr>
+        <p:style>
+          <a:lnRef idx="1">
+            <a:schemeClr val="accent1"/>
+          </a:lnRef>
+          <a:fillRef idx="3">
+            <a:schemeClr val="accent1"/>
+          </a:fillRef>
+          <a:effectRef idx="2">
+            <a:schemeClr val="accent1"/>
+          </a:effectRef>
+          <a:fontRef idx="minor">
+            <a:schemeClr val="lt1"/>
+          </a:fontRef>
+        </p:style>
+        <p:txBody>
+          <a:bodyPr rtlCol="0" anchor="ctr" wrap="square"/>
+          <a:lstStyle/>
+          <a:p>
+            <a:pPr algn="ctr"/>
+            <a:r>
+              <a:rPr sz="1700" b="1">
                 <a:solidFill>
-                  <a:srgbClr val="232323"/>
+                  <a:srgbClr val="202C3C"/>
                 </a:solidFill>
-                <a:latin typeface="Consolas"/>
               </a:rPr>
-              <a:t>wiederhole 4 mal
-    wiederhole 4 mal
-        Schritt
-    *wiederhole
-    LinksDrehen
-*wiederhole</a:t>
-            </a:r>
-          </a:p>
-        </p:txBody>
-      </p:sp>
-      <p:sp>
-        <p:nvSpPr>
-          <p:cNvPr id="6" name="TextBox 5"/>
+              <a:t>K</a:t>
+            </a:r>
+          </a:p>
+        </p:txBody>
+      </p:sp>
+      <p:sp>
+        <p:nvSpPr>
+          <p:cNvPr id="22" name="TextBox 21"/>
           <p:cNvSpPr txBox="1"/>
           <p:nvPr/>
         </p:nvSpPr>
         <p:spPr>
           <a:xfrm>
-            <a:off x="502920" y="6510528"/>
-            <a:ext cx="11064240" cy="182880"/>
+            <a:off x="365760" y="6510528"/>
+            <a:ext cx="11430000" cy="228600"/>
           </a:xfrm>
           <a:prstGeom prst="rect">
             <a:avLst/>
@@ -8827,7 +8411,7 @@
             <a:r>
               <a:rPr sz="800">
                 <a:solidFill>
-                  <a:srgbClr val="646464"/>
+                  <a:srgbClr val="6E6E6E"/>
                 </a:solidFill>
               </a:rPr>
               <a:t>Grafik: eigene Darstellung</a:t>
@@ -8862,13 +8446,13 @@
         <p:spPr>
           <a:xfrm>
             <a:off x="0" y="0"/>
-            <a:ext cx="12191695" cy="100584"/>
-          </a:xfrm>
-          <a:prstGeom prst="rect">
-            <a:avLst/>
-          </a:prstGeom>
-          <a:solidFill>
-            <a:srgbClr val="4472C4"/>
+            <a:ext cx="12191695" cy="109728"/>
+          </a:xfrm>
+          <a:prstGeom prst="rect">
+            <a:avLst/>
+          </a:prstGeom>
+          <a:solidFill>
+            <a:srgbClr val="305396"/>
           </a:solidFill>
           <a:ln>
             <a:noFill/>
@@ -8905,7 +8489,7 @@
         <p:spPr>
           <a:xfrm>
             <a:off x="594360" y="320040"/>
-            <a:ext cx="10972800" cy="502920"/>
+            <a:ext cx="10972800" cy="548640"/>
           </a:xfrm>
           <a:prstGeom prst="rect">
             <a:avLst/>
@@ -8921,10 +8505,10 @@
             <a:r>
               <a:rPr sz="2600" b="1">
                 <a:solidFill>
-                  <a:srgbClr val="1F374E"/>
+                  <a:srgbClr val="202C3C"/>
                 </a:solidFill>
               </a:rPr>
-              <a:t>Fehler sind Informationen</a:t>
+              <a:t>Quellen</a:t>
             </a:r>
           </a:p>
         </p:txBody>
@@ -8938,7 +8522,7 @@
         <p:spPr>
           <a:xfrm>
             <a:off x="685800" y="1234440"/>
-            <a:ext cx="5303520" cy="4937760"/>
+            <a:ext cx="5394960" cy="5029200"/>
           </a:xfrm>
           <a:prstGeom prst="rect">
             <a:avLst/>
@@ -8953,356 +8537,60 @@
           <a:p>
             <a:pPr>
               <a:spcAft>
-                <a:spcPts val="800"/>
+                <a:spcPts val="700"/>
               </a:spcAft>
               <a:defRPr sz="1900">
                 <a:solidFill>
-                  <a:srgbClr val="232323"/>
+                  <a:srgbClr val="1E1E1E"/>
                 </a:solidFill>
               </a:defRPr>
             </a:pPr>
             <a:r>
-              <a:t>Beobachten</a:t>
+              <a:t>Robot Karol: https://www.schule.bayern.de/karol</a:t>
             </a:r>
           </a:p>
           <a:p>
             <a:pPr>
               <a:spcAft>
-                <a:spcPts val="800"/>
+                <a:spcPts val="700"/>
               </a:spcAft>
               <a:defRPr sz="1900">
                 <a:solidFill>
-                  <a:srgbClr val="232323"/>
+                  <a:srgbClr val="1E1E1E"/>
                 </a:solidFill>
               </a:defRPr>
             </a:pPr>
             <a:r>
-              <a:t>Eingrenzen</a:t>
+              <a:t>Sächsischer Lehrplan Oberschule Informatik, Klassenstufe 8: https://www.schulportal.sachsen.de/lplandb/lehrplan/514</a:t>
             </a:r>
           </a:p>
           <a:p>
             <a:pPr>
               <a:spcAft>
-                <a:spcPts val="800"/>
+                <a:spcPts val="700"/>
               </a:spcAft>
               <a:defRPr sz="1900">
                 <a:solidFill>
-                  <a:srgbClr val="232323"/>
+                  <a:srgbClr val="1E1E1E"/>
                 </a:solidFill>
               </a:defRPr>
             </a:pPr>
             <a:r>
-              <a:t>gezielt ändern</a:t>
-            </a:r>
-          </a:p>
-          <a:p>
-            <a:pPr>
-              <a:spcAft>
-                <a:spcPts val="800"/>
-              </a:spcAft>
-              <a:defRPr sz="1900">
-                <a:solidFill>
-                  <a:srgbClr val="232323"/>
-                </a:solidFill>
-              </a:defRPr>
-            </a:pPr>
-            <a:r>
-              <a:t>Testen</a:t>
-            </a:r>
-          </a:p>
-          <a:p>
-            <a:pPr>
-              <a:spcAft>
-                <a:spcPts val="800"/>
-              </a:spcAft>
-              <a:defRPr sz="1900">
-                <a:solidFill>
-                  <a:srgbClr val="232323"/>
-                </a:solidFill>
-              </a:defRPr>
-            </a:pPr>
-            <a:r>
-              <a:t>danach beginnt der Zyklus bei Bedarf erneut</a:t>
-            </a:r>
-          </a:p>
-        </p:txBody>
-      </p:sp>
-      <p:sp>
-        <p:nvSpPr>
-          <p:cNvPr id="5" name="Rounded Rectangle 4"/>
-          <p:cNvSpPr/>
-          <p:nvPr/>
-        </p:nvSpPr>
-        <p:spPr>
-          <a:xfrm>
-            <a:off x="8001000" y="1051560"/>
-            <a:ext cx="1463040" cy="548640"/>
-          </a:xfrm>
-          <a:prstGeom prst="roundRect">
-            <a:avLst/>
-          </a:prstGeom>
-          <a:solidFill>
-            <a:srgbClr val="FFE699"/>
-          </a:solidFill>
-          <a:ln>
-            <a:solidFill>
-              <a:srgbClr val="4472C4"/>
-            </a:solidFill>
-          </a:ln>
-        </p:spPr>
-        <p:style>
-          <a:lnRef idx="1">
-            <a:schemeClr val="accent1"/>
-          </a:lnRef>
-          <a:fillRef idx="3">
-            <a:schemeClr val="accent1"/>
-          </a:fillRef>
-          <a:effectRef idx="2">
-            <a:schemeClr val="accent1"/>
-          </a:effectRef>
-          <a:fontRef idx="minor">
-            <a:schemeClr val="lt1"/>
-          </a:fontRef>
-        </p:style>
-        <p:txBody>
-          <a:bodyPr rtlCol="0" anchor="ctr" wrap="square"/>
-          <a:lstStyle/>
-          <a:p>
-            <a:pPr algn="ctr"/>
-            <a:r>
-              <a:rPr sz="1200" b="1">
-                <a:solidFill>
-                  <a:srgbClr val="1F374E"/>
-                </a:solidFill>
-              </a:rPr>
-              <a:t>Beobachten</a:t>
-            </a:r>
-          </a:p>
-        </p:txBody>
-      </p:sp>
-      <p:sp>
-        <p:nvSpPr>
-          <p:cNvPr id="6" name="Rounded Rectangle 5"/>
-          <p:cNvSpPr/>
-          <p:nvPr/>
-        </p:nvSpPr>
-        <p:spPr>
-          <a:xfrm>
-            <a:off x="9326880" y="2560320"/>
-            <a:ext cx="1463040" cy="548640"/>
-          </a:xfrm>
-          <a:prstGeom prst="roundRect">
-            <a:avLst/>
-          </a:prstGeom>
-          <a:solidFill>
-            <a:srgbClr val="F2F6FA"/>
-          </a:solidFill>
-          <a:ln>
-            <a:solidFill>
-              <a:srgbClr val="4472C4"/>
-            </a:solidFill>
-          </a:ln>
-        </p:spPr>
-        <p:style>
-          <a:lnRef idx="1">
-            <a:schemeClr val="accent1"/>
-          </a:lnRef>
-          <a:fillRef idx="3">
-            <a:schemeClr val="accent1"/>
-          </a:fillRef>
-          <a:effectRef idx="2">
-            <a:schemeClr val="accent1"/>
-          </a:effectRef>
-          <a:fontRef idx="minor">
-            <a:schemeClr val="lt1"/>
-          </a:fontRef>
-        </p:style>
-        <p:txBody>
-          <a:bodyPr rtlCol="0" anchor="ctr" wrap="square"/>
-          <a:lstStyle/>
-          <a:p>
-            <a:pPr algn="ctr"/>
-            <a:r>
-              <a:rPr sz="1200" b="1">
-                <a:solidFill>
-                  <a:srgbClr val="1F374E"/>
-                </a:solidFill>
-              </a:rPr>
-              <a:t>Eingrenzen</a:t>
-            </a:r>
-          </a:p>
-        </p:txBody>
-      </p:sp>
-      <p:sp>
-        <p:nvSpPr>
-          <p:cNvPr id="7" name="Rounded Rectangle 6"/>
-          <p:cNvSpPr/>
-          <p:nvPr/>
-        </p:nvSpPr>
-        <p:spPr>
-          <a:xfrm>
-            <a:off x="8001000" y="4069080"/>
-            <a:ext cx="1463040" cy="548640"/>
-          </a:xfrm>
-          <a:prstGeom prst="roundRect">
-            <a:avLst/>
-          </a:prstGeom>
-          <a:solidFill>
-            <a:srgbClr val="FFE699"/>
-          </a:solidFill>
-          <a:ln>
-            <a:solidFill>
-              <a:srgbClr val="4472C4"/>
-            </a:solidFill>
-          </a:ln>
-        </p:spPr>
-        <p:style>
-          <a:lnRef idx="1">
-            <a:schemeClr val="accent1"/>
-          </a:lnRef>
-          <a:fillRef idx="3">
-            <a:schemeClr val="accent1"/>
-          </a:fillRef>
-          <a:effectRef idx="2">
-            <a:schemeClr val="accent1"/>
-          </a:effectRef>
-          <a:fontRef idx="minor">
-            <a:schemeClr val="lt1"/>
-          </a:fontRef>
-        </p:style>
-        <p:txBody>
-          <a:bodyPr rtlCol="0" anchor="ctr" wrap="square"/>
-          <a:lstStyle/>
-          <a:p>
-            <a:pPr algn="ctr"/>
-            <a:r>
-              <a:rPr sz="1200" b="1">
-                <a:solidFill>
-                  <a:srgbClr val="1F374E"/>
-                </a:solidFill>
-              </a:rPr>
-              <a:t>Ändern</a:t>
-            </a:r>
-          </a:p>
-        </p:txBody>
-      </p:sp>
-      <p:sp>
-        <p:nvSpPr>
-          <p:cNvPr id="8" name="Rounded Rectangle 7"/>
-          <p:cNvSpPr/>
-          <p:nvPr/>
-        </p:nvSpPr>
-        <p:spPr>
-          <a:xfrm>
-            <a:off x="6583680" y="2560320"/>
-            <a:ext cx="1463040" cy="548640"/>
-          </a:xfrm>
-          <a:prstGeom prst="roundRect">
-            <a:avLst/>
-          </a:prstGeom>
-          <a:solidFill>
-            <a:srgbClr val="F2F6FA"/>
-          </a:solidFill>
-          <a:ln>
-            <a:solidFill>
-              <a:srgbClr val="4472C4"/>
-            </a:solidFill>
-          </a:ln>
-        </p:spPr>
-        <p:style>
-          <a:lnRef idx="1">
-            <a:schemeClr val="accent1"/>
-          </a:lnRef>
-          <a:fillRef idx="3">
-            <a:schemeClr val="accent1"/>
-          </a:fillRef>
-          <a:effectRef idx="2">
-            <a:schemeClr val="accent1"/>
-          </a:effectRef>
-          <a:fontRef idx="minor">
-            <a:schemeClr val="lt1"/>
-          </a:fontRef>
-        </p:style>
-        <p:txBody>
-          <a:bodyPr rtlCol="0" anchor="ctr" wrap="square"/>
-          <a:lstStyle/>
-          <a:p>
-            <a:pPr algn="ctr"/>
-            <a:r>
-              <a:rPr sz="1200" b="1">
-                <a:solidFill>
-                  <a:srgbClr val="1F374E"/>
-                </a:solidFill>
-              </a:rPr>
-              <a:t>Testen</a:t>
-            </a:r>
-          </a:p>
-        </p:txBody>
-      </p:sp>
-      <p:sp>
-        <p:nvSpPr>
-          <p:cNvPr id="9" name="Rounded Rectangle 8"/>
-          <p:cNvSpPr/>
-          <p:nvPr/>
-        </p:nvSpPr>
-        <p:spPr>
-          <a:xfrm>
-            <a:off x="7909560" y="2514600"/>
-            <a:ext cx="1645920" cy="640080"/>
-          </a:xfrm>
-          <a:prstGeom prst="roundRect">
-            <a:avLst/>
-          </a:prstGeom>
-          <a:solidFill>
-            <a:srgbClr val="E2EFDA"/>
-          </a:solidFill>
-          <a:ln>
-            <a:solidFill>
-              <a:srgbClr val="4472C4"/>
-            </a:solidFill>
-          </a:ln>
-        </p:spPr>
-        <p:style>
-          <a:lnRef idx="1">
-            <a:schemeClr val="accent1"/>
-          </a:lnRef>
-          <a:fillRef idx="3">
-            <a:schemeClr val="accent1"/>
-          </a:fillRef>
-          <a:effectRef idx="2">
-            <a:schemeClr val="accent1"/>
-          </a:effectRef>
-          <a:fontRef idx="minor">
-            <a:schemeClr val="lt1"/>
-          </a:fontRef>
-        </p:style>
-        <p:txBody>
-          <a:bodyPr rtlCol="0" anchor="ctr" wrap="square"/>
-          <a:lstStyle/>
-          <a:p>
-            <a:pPr algn="ctr"/>
-            <a:r>
-              <a:rPr sz="1300" b="1">
-                <a:solidFill>
-                  <a:srgbClr val="1F374E"/>
-                </a:solidFill>
-              </a:rPr>
-              <a:t>Programm
-verbessern</a:t>
-            </a:r>
-          </a:p>
-        </p:txBody>
-      </p:sp>
-      <p:sp>
-        <p:nvSpPr>
-          <p:cNvPr id="10" name="TextBox 9"/>
+              <a:t>Grafiken und Codebeispiele: eigene didaktische Darstellung.</a:t>
+            </a:r>
+          </a:p>
+        </p:txBody>
+      </p:sp>
+      <p:sp>
+        <p:nvSpPr>
+          <p:cNvPr id="5" name="TextBox 4"/>
           <p:cNvSpPr txBox="1"/>
           <p:nvPr/>
         </p:nvSpPr>
         <p:spPr>
           <a:xfrm>
-            <a:off x="502920" y="6510528"/>
-            <a:ext cx="11064240" cy="182880"/>
+            <a:off x="365760" y="6510528"/>
+            <a:ext cx="11430000" cy="228600"/>
           </a:xfrm>
           <a:prstGeom prst="rect">
             <a:avLst/>
@@ -9319,10 +8607,10 @@
             <a:r>
               <a:rPr sz="800">
                 <a:solidFill>
-                  <a:srgbClr val="646464"/>
+                  <a:srgbClr val="6E6E6E"/>
                 </a:solidFill>
               </a:rPr>
-              <a:t>Grafik: eigene Darstellung</a:t>
+              <a:t>Quellenangaben · Grafiken: eigene Darstellung</a:t>
             </a:r>
           </a:p>
         </p:txBody>
